--- a/output/wordlabs-rotate-3day.pptx
+++ b/output/wordlabs-rotate-3day.pptx
@@ -5622,7 +5622,7 @@
                 <a:ea typeface="Trebuchet MS" pitchFamily="34" charset="-122"/>
                 <a:cs typeface="Trebuchet MS" pitchFamily="34" charset="-120"/>
               </a:rPr>
-              <a:t>0</a:t>
+              <a:t>1</a:t>
             </a:r>
             <a:pPr algn="ctr" indent="0" marL="0">
               <a:buNone/>
@@ -6057,7 +6057,7 @@
                 <a:ea typeface="Calibri" pitchFamily="34" charset="-122"/>
                 <a:cs typeface="Calibri" pitchFamily="34" charset="-120"/>
               </a:rPr>
-              <a:t>rotating</a:t>
+              <a:t>rotation</a:t>
             </a:r>
             <a:pPr algn="l" indent="0" marL="0">
               <a:buNone/>
@@ -6071,7 +6071,7 @@
                 <a:ea typeface="Calibri" pitchFamily="34" charset="-122"/>
                 <a:cs typeface="Calibri" pitchFamily="34" charset="-120"/>
               </a:rPr>
-              <a:t> blades of the helicopter created a strong </a:t>
+              <a:t> of the fan blades was steady, and the </a:t>
             </a:r>
             <a:pPr algn="l" indent="0" marL="0">
               <a:buNone/>
@@ -6088,7 +6088,7 @@
                 <a:ea typeface="Calibri" pitchFamily="34" charset="-122"/>
                 <a:cs typeface="Calibri" pitchFamily="34" charset="-120"/>
               </a:rPr>
-              <a:t>rotation</a:t>
+              <a:t>rotating</a:t>
             </a:r>
             <a:pPr algn="l" indent="0" marL="0">
               <a:buNone/>
@@ -6102,7 +6102,7 @@
                 <a:ea typeface="Calibri" pitchFamily="34" charset="-122"/>
                 <a:cs typeface="Calibri" pitchFamily="34" charset="-120"/>
               </a:rPr>
-              <a:t> of air beneath it.</a:t>
+              <a:t> motor kept the room cool all afternoon.</a:t>
             </a:r>
             <a:endParaRPr lang="en-US" sz="1800" dirty="0"/>
           </a:p>
@@ -6257,7 +6257,7 @@
                 <a:ea typeface="Trebuchet MS" pitchFamily="34" charset="-122"/>
                 <a:cs typeface="Trebuchet MS" pitchFamily="34" charset="-120"/>
               </a:rPr>
-              <a:t>rotating</a:t>
+              <a:t>rotation</a:t>
             </a:r>
             <a:endParaRPr lang="en-US" sz="1400" dirty="0"/>
           </a:p>
@@ -6385,7 +6385,7 @@
                 <a:ea typeface="Trebuchet MS" pitchFamily="34" charset="-122"/>
                 <a:cs typeface="Trebuchet MS" pitchFamily="34" charset="-120"/>
               </a:rPr>
-              <a:t>rotation</a:t>
+              <a:t>rotating</a:t>
             </a:r>
             <a:endParaRPr lang="en-US" sz="1400" dirty="0"/>
           </a:p>
@@ -6855,7 +6855,7 @@
                 <a:ea typeface="Trebuchet MS" pitchFamily="34" charset="-122"/>
                 <a:cs typeface="Trebuchet MS" pitchFamily="34" charset="-120"/>
               </a:rPr>
-              <a:t>rotating</a:t>
+              <a:t>rotation</a:t>
             </a:r>
             <a:endParaRPr lang="en-US" sz="2800" dirty="0"/>
           </a:p>
@@ -7682,7 +7682,7 @@
                 <a:ea typeface="Trebuchet MS" pitchFamily="34" charset="-122"/>
                 <a:cs typeface="Trebuchet MS" pitchFamily="34" charset="-120"/>
               </a:rPr>
-              <a:t>rotating</a:t>
+              <a:t>rotation</a:t>
             </a:r>
             <a:endParaRPr lang="en-US" sz="2800" dirty="0"/>
           </a:p>
@@ -7860,7 +7860,7 @@
                 <a:ea typeface="Calibri" pitchFamily="34" charset="-122"/>
                 <a:cs typeface="Calibri" pitchFamily="34" charset="-120"/>
               </a:rPr>
-              <a:t>to turn or spin</a:t>
+              <a:t>to turn or spin around</a:t>
             </a:r>
             <a:endParaRPr lang="en-US" sz="850" dirty="0"/>
           </a:p>
@@ -7972,7 +7972,7 @@
                 <a:ea typeface="Trebuchet MS" pitchFamily="34" charset="-122"/>
                 <a:cs typeface="Trebuchet MS" pitchFamily="34" charset="-120"/>
               </a:rPr>
-              <a:t>ing</a:t>
+              <a:t>ion</a:t>
             </a:r>
             <a:endParaRPr lang="en-US" sz="1300" dirty="0"/>
           </a:p>
@@ -8011,7 +8011,7 @@
                 <a:ea typeface="Calibri" pitchFamily="34" charset="-122"/>
                 <a:cs typeface="Calibri" pitchFamily="34" charset="-120"/>
               </a:rPr>
-              <a:t>currently doing</a:t>
+              <a:t>act or process of</a:t>
             </a:r>
             <a:endParaRPr lang="en-US" sz="850" dirty="0"/>
           </a:p>
@@ -8706,7 +8706,7 @@
                 <a:ea typeface="Trebuchet MS" pitchFamily="34" charset="-122"/>
                 <a:cs typeface="Trebuchet MS" pitchFamily="34" charset="-120"/>
               </a:rPr>
-              <a:t>rotating</a:t>
+              <a:t>rotation</a:t>
             </a:r>
             <a:endParaRPr lang="en-US" sz="2800" dirty="0"/>
           </a:p>
@@ -8884,7 +8884,7 @@
                 <a:ea typeface="Calibri" pitchFamily="34" charset="-122"/>
                 <a:cs typeface="Calibri" pitchFamily="34" charset="-120"/>
               </a:rPr>
-              <a:t>to turn or spin</a:t>
+              <a:t>to turn or spin around</a:t>
             </a:r>
             <a:endParaRPr lang="en-US" sz="850" dirty="0"/>
           </a:p>
@@ -8996,7 +8996,7 @@
                 <a:ea typeface="Trebuchet MS" pitchFamily="34" charset="-122"/>
                 <a:cs typeface="Trebuchet MS" pitchFamily="34" charset="-120"/>
               </a:rPr>
-              <a:t>ing</a:t>
+              <a:t>ion</a:t>
             </a:r>
             <a:endParaRPr lang="en-US" sz="1300" dirty="0"/>
           </a:p>
@@ -9035,7 +9035,7 @@
                 <a:ea typeface="Calibri" pitchFamily="34" charset="-122"/>
                 <a:cs typeface="Calibri" pitchFamily="34" charset="-120"/>
               </a:rPr>
-              <a:t>currently doing</a:t>
+              <a:t>act or process of</a:t>
             </a:r>
             <a:endParaRPr lang="en-US" sz="850" dirty="0"/>
           </a:p>
@@ -9299,7 +9299,7 @@
                 <a:ea typeface="Trebuchet MS" pitchFamily="34" charset="-122"/>
                 <a:cs typeface="Trebuchet MS" pitchFamily="34" charset="-120"/>
               </a:rPr>
-              <a:t>tat</a:t>
+              <a:t>ta</a:t>
             </a:r>
             <a:endParaRPr lang="en-US" sz="1400" dirty="0"/>
           </a:p>
@@ -9404,7 +9404,7 @@
                 <a:ea typeface="Trebuchet MS" pitchFamily="34" charset="-122"/>
                 <a:cs typeface="Trebuchet MS" pitchFamily="34" charset="-120"/>
               </a:rPr>
-              <a:t>ing</a:t>
+              <a:t>tion</a:t>
             </a:r>
             <a:endParaRPr lang="en-US" sz="1400" dirty="0"/>
           </a:p>
@@ -9967,7 +9967,7 @@
                 <a:ea typeface="Trebuchet MS" pitchFamily="34" charset="-122"/>
                 <a:cs typeface="Trebuchet MS" pitchFamily="34" charset="-120"/>
               </a:rPr>
-              <a:t>rotating</a:t>
+              <a:t>rotation</a:t>
             </a:r>
             <a:endParaRPr lang="en-US" sz="2800" dirty="0"/>
           </a:p>
@@ -10145,7 +10145,7 @@
                 <a:ea typeface="Calibri" pitchFamily="34" charset="-122"/>
                 <a:cs typeface="Calibri" pitchFamily="34" charset="-120"/>
               </a:rPr>
-              <a:t>to turn or spin</a:t>
+              <a:t>to turn or spin around</a:t>
             </a:r>
             <a:endParaRPr lang="en-US" sz="850" dirty="0"/>
           </a:p>
@@ -10257,7 +10257,7 @@
                 <a:ea typeface="Trebuchet MS" pitchFamily="34" charset="-122"/>
                 <a:cs typeface="Trebuchet MS" pitchFamily="34" charset="-120"/>
               </a:rPr>
-              <a:t>ing</a:t>
+              <a:t>ion</a:t>
             </a:r>
             <a:endParaRPr lang="en-US" sz="1300" dirty="0"/>
           </a:p>
@@ -10296,7 +10296,7 @@
                 <a:ea typeface="Calibri" pitchFamily="34" charset="-122"/>
                 <a:cs typeface="Calibri" pitchFamily="34" charset="-120"/>
               </a:rPr>
-              <a:t>currently doing</a:t>
+              <a:t>act or process of</a:t>
             </a:r>
             <a:endParaRPr lang="en-US" sz="850" dirty="0"/>
           </a:p>
@@ -10560,7 +10560,7 @@
                 <a:ea typeface="Trebuchet MS" pitchFamily="34" charset="-122"/>
                 <a:cs typeface="Trebuchet MS" pitchFamily="34" charset="-120"/>
               </a:rPr>
-              <a:t>tat</a:t>
+              <a:t>ta</a:t>
             </a:r>
             <a:endParaRPr lang="en-US" sz="1400" dirty="0"/>
           </a:p>
@@ -10665,7 +10665,7 @@
                 <a:ea typeface="Trebuchet MS" pitchFamily="34" charset="-122"/>
                 <a:cs typeface="Trebuchet MS" pitchFamily="34" charset="-120"/>
               </a:rPr>
-              <a:t>ing</a:t>
+              <a:t>tion</a:t>
             </a:r>
             <a:endParaRPr lang="en-US" sz="1400" dirty="0"/>
           </a:p>
@@ -10746,11 +10746,11 @@
         <p:spPr>
           <a:xfrm>
             <a:off x="1874520" y="4096512"/>
-            <a:ext cx="6903720" cy="658368"/>
+            <a:ext cx="6903720" cy="804672"/>
           </a:xfrm>
           <a:prstGeom prst="rect">
             <a:avLst>
-              <a:gd name="adj" fmla="val 8333"/>
+              <a:gd name="adj" fmla="val 6818"/>
             </a:avLst>
           </a:prstGeom>
           <a:solidFill>
@@ -10772,12 +10772,12 @@
         </p:nvSpPr>
         <p:spPr>
           <a:xfrm>
-            <a:off x="2254649" y="4169664"/>
-            <a:ext cx="685800" cy="475488"/>
+            <a:off x="2124837" y="4169664"/>
+            <a:ext cx="685800" cy="384048"/>
           </a:xfrm>
           <a:prstGeom prst="rect">
             <a:avLst>
-              <a:gd name="adj" fmla="val 7692"/>
+              <a:gd name="adj" fmla="val 9524"/>
             </a:avLst>
           </a:prstGeom>
           <a:solidFill>
@@ -10799,8 +10799,8 @@
         </p:nvSpPr>
         <p:spPr>
           <a:xfrm>
-            <a:off x="2254649" y="4169664"/>
-            <a:ext cx="685800" cy="475488"/>
+            <a:off x="2124837" y="4169664"/>
+            <a:ext cx="685800" cy="384048"/>
           </a:xfrm>
           <a:prstGeom prst="rect">
             <a:avLst/>
@@ -10838,12 +10838,12 @@
         </p:nvSpPr>
         <p:spPr>
           <a:xfrm>
-            <a:off x="3293146" y="4169664"/>
-            <a:ext cx="685800" cy="475488"/>
+            <a:off x="3033522" y="4169664"/>
+            <a:ext cx="685800" cy="384048"/>
           </a:xfrm>
           <a:prstGeom prst="rect">
             <a:avLst>
-              <a:gd name="adj" fmla="val 7692"/>
+              <a:gd name="adj" fmla="val 9524"/>
             </a:avLst>
           </a:prstGeom>
           <a:solidFill>
@@ -10865,8 +10865,8 @@
         </p:nvSpPr>
         <p:spPr>
           <a:xfrm>
-            <a:off x="3293146" y="4169664"/>
-            <a:ext cx="685800" cy="475488"/>
+            <a:off x="3033522" y="4169664"/>
+            <a:ext cx="685800" cy="384048"/>
           </a:xfrm>
           <a:prstGeom prst="rect">
             <a:avLst/>
@@ -10904,12 +10904,12 @@
         </p:nvSpPr>
         <p:spPr>
           <a:xfrm>
-            <a:off x="4331643" y="4169664"/>
-            <a:ext cx="685800" cy="475488"/>
+            <a:off x="3942207" y="4169664"/>
+            <a:ext cx="685800" cy="384048"/>
           </a:xfrm>
           <a:prstGeom prst="rect">
             <a:avLst>
-              <a:gd name="adj" fmla="val 7692"/>
+              <a:gd name="adj" fmla="val 9524"/>
             </a:avLst>
           </a:prstGeom>
           <a:solidFill>
@@ -10931,8 +10931,8 @@
         </p:nvSpPr>
         <p:spPr>
           <a:xfrm>
-            <a:off x="4331643" y="4169664"/>
-            <a:ext cx="685800" cy="475488"/>
+            <a:off x="3942207" y="4169664"/>
+            <a:ext cx="685800" cy="384048"/>
           </a:xfrm>
           <a:prstGeom prst="rect">
             <a:avLst/>
@@ -10964,18 +10964,57 @@
       </p:sp>
       <p:sp>
         <p:nvSpPr>
-          <p:cNvPr id="43" name="Shape 41"/>
-          <p:cNvSpPr/>
-          <p:nvPr/>
-        </p:nvSpPr>
-        <p:spPr>
-          <a:xfrm>
-            <a:off x="5370141" y="4169664"/>
-            <a:ext cx="685800" cy="475488"/>
+          <p:cNvPr id="43" name="Text 41"/>
+          <p:cNvSpPr/>
+          <p:nvPr/>
+        </p:nvSpPr>
+        <p:spPr>
+          <a:xfrm>
+            <a:off x="3942207" y="4572000"/>
+            <a:ext cx="685800" cy="219456"/>
+          </a:xfrm>
+          <a:prstGeom prst="rect">
+            <a:avLst/>
+          </a:prstGeom>
+          <a:noFill/>
+          <a:ln/>
+        </p:spPr>
+        <p:txBody>
+          <a:bodyPr wrap="square" lIns="0" tIns="0" rIns="0" bIns="0" rtlCol="0" anchor="t"/>
+          <a:lstStyle/>
+          <a:p>
+            <a:pPr algn="ctr" indent="0" marL="0">
+              <a:buNone/>
+            </a:pPr>
+            <a:r>
+              <a:rPr lang="en-US" sz="750" i="1" dirty="0">
+                <a:solidFill>
+                  <a:srgbClr val="94A3B8"/>
+                </a:solidFill>
+                <a:latin typeface="Calibri" pitchFamily="34" charset="0"/>
+                <a:ea typeface="Calibri" pitchFamily="34" charset="-122"/>
+                <a:cs typeface="Calibri" pitchFamily="34" charset="-120"/>
+              </a:rPr>
+              <a:t>/t/</a:t>
+            </a:r>
+            <a:endParaRPr lang="en-US" sz="750" dirty="0"/>
+          </a:p>
+        </p:txBody>
+      </p:sp>
+      <p:sp>
+        <p:nvSpPr>
+          <p:cNvPr id="44" name="Shape 42"/>
+          <p:cNvSpPr/>
+          <p:nvPr/>
+        </p:nvSpPr>
+        <p:spPr>
+          <a:xfrm>
+            <a:off x="4850892" y="4169664"/>
+            <a:ext cx="685800" cy="384048"/>
           </a:xfrm>
           <a:prstGeom prst="rect">
             <a:avLst>
-              <a:gd name="adj" fmla="val 7692"/>
+              <a:gd name="adj" fmla="val 9524"/>
             </a:avLst>
           </a:prstGeom>
           <a:solidFill>
@@ -10991,14 +11030,14 @@
       </p:sp>
       <p:sp>
         <p:nvSpPr>
-          <p:cNvPr id="44" name="Text 42"/>
-          <p:cNvSpPr/>
-          <p:nvPr/>
-        </p:nvSpPr>
-        <p:spPr>
-          <a:xfrm>
-            <a:off x="5370141" y="4169664"/>
-            <a:ext cx="685800" cy="475488"/>
+          <p:cNvPr id="45" name="Text 43"/>
+          <p:cNvSpPr/>
+          <p:nvPr/>
+        </p:nvSpPr>
+        <p:spPr>
+          <a:xfrm>
+            <a:off x="4850892" y="4169664"/>
+            <a:ext cx="685800" cy="384048"/>
           </a:xfrm>
           <a:prstGeom prst="rect">
             <a:avLst/>
@@ -11030,18 +11069,18 @@
       </p:sp>
       <p:sp>
         <p:nvSpPr>
-          <p:cNvPr id="45" name="Shape 43"/>
-          <p:cNvSpPr/>
-          <p:nvPr/>
-        </p:nvSpPr>
-        <p:spPr>
-          <a:xfrm>
-            <a:off x="6408638" y="4169664"/>
-            <a:ext cx="685800" cy="475488"/>
+          <p:cNvPr id="46" name="Shape 44"/>
+          <p:cNvSpPr/>
+          <p:nvPr/>
+        </p:nvSpPr>
+        <p:spPr>
+          <a:xfrm>
+            <a:off x="5759577" y="4169664"/>
+            <a:ext cx="685800" cy="384048"/>
           </a:xfrm>
           <a:prstGeom prst="rect">
             <a:avLst>
-              <a:gd name="adj" fmla="val 7692"/>
+              <a:gd name="adj" fmla="val 9524"/>
             </a:avLst>
           </a:prstGeom>
           <a:solidFill>
@@ -11057,14 +11096,14 @@
       </p:sp>
       <p:sp>
         <p:nvSpPr>
-          <p:cNvPr id="46" name="Text 44"/>
-          <p:cNvSpPr/>
-          <p:nvPr/>
-        </p:nvSpPr>
-        <p:spPr>
-          <a:xfrm>
-            <a:off x="6408638" y="4169664"/>
-            <a:ext cx="685800" cy="475488"/>
+          <p:cNvPr id="47" name="Text 45"/>
+          <p:cNvSpPr/>
+          <p:nvPr/>
+        </p:nvSpPr>
+        <p:spPr>
+          <a:xfrm>
+            <a:off x="5759577" y="4169664"/>
+            <a:ext cx="685800" cy="384048"/>
           </a:xfrm>
           <a:prstGeom prst="rect">
             <a:avLst/>
@@ -11096,18 +11135,57 @@
       </p:sp>
       <p:sp>
         <p:nvSpPr>
-          <p:cNvPr id="47" name="Shape 45"/>
-          <p:cNvSpPr/>
-          <p:nvPr/>
-        </p:nvSpPr>
-        <p:spPr>
-          <a:xfrm>
-            <a:off x="7447135" y="4169664"/>
-            <a:ext cx="685800" cy="475488"/>
+          <p:cNvPr id="48" name="Text 46"/>
+          <p:cNvSpPr/>
+          <p:nvPr/>
+        </p:nvSpPr>
+        <p:spPr>
+          <a:xfrm>
+            <a:off x="5759577" y="4572000"/>
+            <a:ext cx="685800" cy="219456"/>
+          </a:xfrm>
+          <a:prstGeom prst="rect">
+            <a:avLst/>
+          </a:prstGeom>
+          <a:noFill/>
+          <a:ln/>
+        </p:spPr>
+        <p:txBody>
+          <a:bodyPr wrap="square" lIns="0" tIns="0" rIns="0" bIns="0" rtlCol="0" anchor="t"/>
+          <a:lstStyle/>
+          <a:p>
+            <a:pPr algn="ctr" indent="0" marL="0">
+              <a:buNone/>
+            </a:pPr>
+            <a:r>
+              <a:rPr lang="en-US" sz="750" i="1" dirty="0">
+                <a:solidFill>
+                  <a:srgbClr val="94A3B8"/>
+                </a:solidFill>
+                <a:latin typeface="Calibri" pitchFamily="34" charset="0"/>
+                <a:ea typeface="Calibri" pitchFamily="34" charset="-122"/>
+                <a:cs typeface="Calibri" pitchFamily="34" charset="-120"/>
+              </a:rPr>
+              <a:t>/sh/</a:t>
+            </a:r>
+            <a:endParaRPr lang="en-US" sz="750" dirty="0"/>
+          </a:p>
+        </p:txBody>
+      </p:sp>
+      <p:sp>
+        <p:nvSpPr>
+          <p:cNvPr id="49" name="Shape 47"/>
+          <p:cNvSpPr/>
+          <p:nvPr/>
+        </p:nvSpPr>
+        <p:spPr>
+          <a:xfrm>
+            <a:off x="6668262" y="4169664"/>
+            <a:ext cx="685800" cy="384048"/>
           </a:xfrm>
           <a:prstGeom prst="rect">
             <a:avLst>
-              <a:gd name="adj" fmla="val 7692"/>
+              <a:gd name="adj" fmla="val 9524"/>
             </a:avLst>
           </a:prstGeom>
           <a:solidFill>
@@ -11123,14 +11201,14 @@
       </p:sp>
       <p:sp>
         <p:nvSpPr>
-          <p:cNvPr id="48" name="Text 46"/>
-          <p:cNvSpPr/>
-          <p:nvPr/>
-        </p:nvSpPr>
-        <p:spPr>
-          <a:xfrm>
-            <a:off x="7447135" y="4169664"/>
-            <a:ext cx="685800" cy="475488"/>
+          <p:cNvPr id="50" name="Text 48"/>
+          <p:cNvSpPr/>
+          <p:nvPr/>
+        </p:nvSpPr>
+        <p:spPr>
+          <a:xfrm>
+            <a:off x="6668262" y="4169664"/>
+            <a:ext cx="685800" cy="384048"/>
           </a:xfrm>
           <a:prstGeom prst="rect">
             <a:avLst/>
@@ -11154,7 +11232,73 @@
                 <a:ea typeface="Trebuchet MS" pitchFamily="34" charset="-122"/>
                 <a:cs typeface="Trebuchet MS" pitchFamily="34" charset="-120"/>
               </a:rPr>
-              <a:t>ing</a:t>
+              <a:t>io</a:t>
+            </a:r>
+            <a:endParaRPr lang="en-US" sz="900" dirty="0"/>
+          </a:p>
+        </p:txBody>
+      </p:sp>
+      <p:sp>
+        <p:nvSpPr>
+          <p:cNvPr id="51" name="Shape 49"/>
+          <p:cNvSpPr/>
+          <p:nvPr/>
+        </p:nvSpPr>
+        <p:spPr>
+          <a:xfrm>
+            <a:off x="7576947" y="4169664"/>
+            <a:ext cx="685800" cy="384048"/>
+          </a:xfrm>
+          <a:prstGeom prst="rect">
+            <a:avLst>
+              <a:gd name="adj" fmla="val 9524"/>
+            </a:avLst>
+          </a:prstGeom>
+          <a:solidFill>
+            <a:srgbClr val="FFFFFF"/>
+          </a:solidFill>
+          <a:ln w="12700">
+            <a:solidFill>
+              <a:srgbClr val="DB2777"/>
+            </a:solidFill>
+            <a:prstDash val="solid"/>
+          </a:ln>
+        </p:spPr>
+      </p:sp>
+      <p:sp>
+        <p:nvSpPr>
+          <p:cNvPr id="52" name="Text 50"/>
+          <p:cNvSpPr/>
+          <p:nvPr/>
+        </p:nvSpPr>
+        <p:spPr>
+          <a:xfrm>
+            <a:off x="7576947" y="4169664"/>
+            <a:ext cx="685800" cy="384048"/>
+          </a:xfrm>
+          <a:prstGeom prst="rect">
+            <a:avLst/>
+          </a:prstGeom>
+          <a:noFill/>
+          <a:ln/>
+        </p:spPr>
+        <p:txBody>
+          <a:bodyPr wrap="square" lIns="0" tIns="0" rIns="0" bIns="0" rtlCol="0" anchor="ctr"/>
+          <a:lstStyle/>
+          <a:p>
+            <a:pPr algn="ctr" indent="0" marL="0">
+              <a:buNone/>
+            </a:pPr>
+            <a:r>
+              <a:rPr lang="en-US" sz="900" b="1" dirty="0">
+                <a:solidFill>
+                  <a:srgbClr val="9D174D"/>
+                </a:solidFill>
+                <a:latin typeface="Trebuchet MS" pitchFamily="34" charset="0"/>
+                <a:ea typeface="Trebuchet MS" pitchFamily="34" charset="-122"/>
+                <a:cs typeface="Trebuchet MS" pitchFamily="34" charset="-120"/>
+              </a:rPr>
+              <a:t>n</a:t>
             </a:r>
             <a:endParaRPr lang="en-US" sz="900" dirty="0"/>
           </a:p>
@@ -11585,7 +11729,7 @@
                 <a:ea typeface="Trebuchet MS" pitchFamily="34" charset="-122"/>
                 <a:cs typeface="Trebuchet MS" pitchFamily="34" charset="-120"/>
               </a:rPr>
-              <a:t>rotation</a:t>
+              <a:t>rotating</a:t>
             </a:r>
             <a:endParaRPr lang="en-US" sz="2800" dirty="0"/>
           </a:p>
@@ -12412,7 +12556,7 @@
                 <a:ea typeface="Trebuchet MS" pitchFamily="34" charset="-122"/>
                 <a:cs typeface="Trebuchet MS" pitchFamily="34" charset="-120"/>
               </a:rPr>
-              <a:t>rotation</a:t>
+              <a:t>rotating</a:t>
             </a:r>
             <a:endParaRPr lang="en-US" sz="2800" dirty="0"/>
           </a:p>
@@ -12590,7 +12734,7 @@
                 <a:ea typeface="Calibri" pitchFamily="34" charset="-122"/>
                 <a:cs typeface="Calibri" pitchFamily="34" charset="-120"/>
               </a:rPr>
-              <a:t>to turn or spin</a:t>
+              <a:t>to turn or spin around</a:t>
             </a:r>
             <a:endParaRPr lang="en-US" sz="850" dirty="0"/>
           </a:p>
@@ -12702,7 +12846,7 @@
                 <a:ea typeface="Trebuchet MS" pitchFamily="34" charset="-122"/>
                 <a:cs typeface="Trebuchet MS" pitchFamily="34" charset="-120"/>
               </a:rPr>
-              <a:t>ion</a:t>
+              <a:t>ing</a:t>
             </a:r>
             <a:endParaRPr lang="en-US" sz="1300" dirty="0"/>
           </a:p>
@@ -12741,7 +12885,7 @@
                 <a:ea typeface="Calibri" pitchFamily="34" charset="-122"/>
                 <a:cs typeface="Calibri" pitchFamily="34" charset="-120"/>
               </a:rPr>
-              <a:t>act or result of</a:t>
+              <a:t>currently doing</a:t>
             </a:r>
             <a:endParaRPr lang="en-US" sz="850" dirty="0"/>
           </a:p>
@@ -13436,7 +13580,7 @@
                 <a:ea typeface="Trebuchet MS" pitchFamily="34" charset="-122"/>
                 <a:cs typeface="Trebuchet MS" pitchFamily="34" charset="-120"/>
               </a:rPr>
-              <a:t>rotation</a:t>
+              <a:t>rotating</a:t>
             </a:r>
             <a:endParaRPr lang="en-US" sz="2800" dirty="0"/>
           </a:p>
@@ -13614,7 +13758,7 @@
                 <a:ea typeface="Calibri" pitchFamily="34" charset="-122"/>
                 <a:cs typeface="Calibri" pitchFamily="34" charset="-120"/>
               </a:rPr>
-              <a:t>to turn or spin</a:t>
+              <a:t>to turn or spin around</a:t>
             </a:r>
             <a:endParaRPr lang="en-US" sz="850" dirty="0"/>
           </a:p>
@@ -13726,7 +13870,7 @@
                 <a:ea typeface="Trebuchet MS" pitchFamily="34" charset="-122"/>
                 <a:cs typeface="Trebuchet MS" pitchFamily="34" charset="-120"/>
               </a:rPr>
-              <a:t>ion</a:t>
+              <a:t>ing</a:t>
             </a:r>
             <a:endParaRPr lang="en-US" sz="1300" dirty="0"/>
           </a:p>
@@ -13765,7 +13909,7 @@
                 <a:ea typeface="Calibri" pitchFamily="34" charset="-122"/>
                 <a:cs typeface="Calibri" pitchFamily="34" charset="-120"/>
               </a:rPr>
-              <a:t>act or result of</a:t>
+              <a:t>currently doing</a:t>
             </a:r>
             <a:endParaRPr lang="en-US" sz="850" dirty="0"/>
           </a:p>
@@ -14134,7 +14278,7 @@
                 <a:ea typeface="Trebuchet MS" pitchFamily="34" charset="-122"/>
                 <a:cs typeface="Trebuchet MS" pitchFamily="34" charset="-120"/>
               </a:rPr>
-              <a:t>tion</a:t>
+              <a:t>ting</a:t>
             </a:r>
             <a:endParaRPr lang="en-US" sz="1400" dirty="0"/>
           </a:p>
@@ -14962,7 +15106,7 @@
                 <a:ea typeface="Trebuchet MS" pitchFamily="34" charset="-122"/>
                 <a:cs typeface="Trebuchet MS" pitchFamily="34" charset="-120"/>
               </a:rPr>
-              <a:t>rotation</a:t>
+              <a:t>rotating</a:t>
             </a:r>
             <a:endParaRPr lang="en-US" sz="2800" dirty="0"/>
           </a:p>
@@ -15140,7 +15284,7 @@
                 <a:ea typeface="Calibri" pitchFamily="34" charset="-122"/>
                 <a:cs typeface="Calibri" pitchFamily="34" charset="-120"/>
               </a:rPr>
-              <a:t>to turn or spin</a:t>
+              <a:t>to turn or spin around</a:t>
             </a:r>
             <a:endParaRPr lang="en-US" sz="850" dirty="0"/>
           </a:p>
@@ -15252,7 +15396,7 @@
                 <a:ea typeface="Trebuchet MS" pitchFamily="34" charset="-122"/>
                 <a:cs typeface="Trebuchet MS" pitchFamily="34" charset="-120"/>
               </a:rPr>
-              <a:t>ion</a:t>
+              <a:t>ing</a:t>
             </a:r>
             <a:endParaRPr lang="en-US" sz="1300" dirty="0"/>
           </a:p>
@@ -15291,7 +15435,7 @@
                 <a:ea typeface="Calibri" pitchFamily="34" charset="-122"/>
                 <a:cs typeface="Calibri" pitchFamily="34" charset="-120"/>
               </a:rPr>
-              <a:t>act or result of</a:t>
+              <a:t>currently doing</a:t>
             </a:r>
             <a:endParaRPr lang="en-US" sz="850" dirty="0"/>
           </a:p>
@@ -15660,7 +15804,7 @@
                 <a:ea typeface="Trebuchet MS" pitchFamily="34" charset="-122"/>
                 <a:cs typeface="Trebuchet MS" pitchFamily="34" charset="-120"/>
               </a:rPr>
-              <a:t>tion</a:t>
+              <a:t>ting</a:t>
             </a:r>
             <a:endParaRPr lang="en-US" sz="1400" dirty="0"/>
           </a:p>
@@ -15741,11 +15885,11 @@
         <p:spPr>
           <a:xfrm>
             <a:off x="1874520" y="4096512"/>
-            <a:ext cx="6903720" cy="804672"/>
+            <a:ext cx="6903720" cy="658368"/>
           </a:xfrm>
           <a:prstGeom prst="rect">
             <a:avLst>
-              <a:gd name="adj" fmla="val 6818"/>
+              <a:gd name="adj" fmla="val 8333"/>
             </a:avLst>
           </a:prstGeom>
           <a:solidFill>
@@ -15767,12 +15911,12 @@
         </p:nvSpPr>
         <p:spPr>
           <a:xfrm>
-            <a:off x="2124837" y="4169664"/>
-            <a:ext cx="685800" cy="384048"/>
+            <a:off x="2254649" y="4169664"/>
+            <a:ext cx="685800" cy="475488"/>
           </a:xfrm>
           <a:prstGeom prst="rect">
             <a:avLst>
-              <a:gd name="adj" fmla="val 9524"/>
+              <a:gd name="adj" fmla="val 7692"/>
             </a:avLst>
           </a:prstGeom>
           <a:solidFill>
@@ -15794,8 +15938,8 @@
         </p:nvSpPr>
         <p:spPr>
           <a:xfrm>
-            <a:off x="2124837" y="4169664"/>
-            <a:ext cx="685800" cy="384048"/>
+            <a:off x="2254649" y="4169664"/>
+            <a:ext cx="685800" cy="475488"/>
           </a:xfrm>
           <a:prstGeom prst="rect">
             <a:avLst/>
@@ -15833,12 +15977,12 @@
         </p:nvSpPr>
         <p:spPr>
           <a:xfrm>
-            <a:off x="3033522" y="4169664"/>
-            <a:ext cx="685800" cy="384048"/>
+            <a:off x="3293146" y="4169664"/>
+            <a:ext cx="685800" cy="475488"/>
           </a:xfrm>
           <a:prstGeom prst="rect">
             <a:avLst>
-              <a:gd name="adj" fmla="val 9524"/>
+              <a:gd name="adj" fmla="val 7692"/>
             </a:avLst>
           </a:prstGeom>
           <a:solidFill>
@@ -15860,8 +16004,8 @@
         </p:nvSpPr>
         <p:spPr>
           <a:xfrm>
-            <a:off x="3033522" y="4169664"/>
-            <a:ext cx="685800" cy="384048"/>
+            <a:off x="3293146" y="4169664"/>
+            <a:ext cx="685800" cy="475488"/>
           </a:xfrm>
           <a:prstGeom prst="rect">
             <a:avLst/>
@@ -15899,12 +16043,12 @@
         </p:nvSpPr>
         <p:spPr>
           <a:xfrm>
-            <a:off x="3942207" y="4169664"/>
-            <a:ext cx="685800" cy="384048"/>
+            <a:off x="4331643" y="4169664"/>
+            <a:ext cx="685800" cy="475488"/>
           </a:xfrm>
           <a:prstGeom prst="rect">
             <a:avLst>
-              <a:gd name="adj" fmla="val 9524"/>
+              <a:gd name="adj" fmla="val 7692"/>
             </a:avLst>
           </a:prstGeom>
           <a:solidFill>
@@ -15926,8 +16070,8 @@
         </p:nvSpPr>
         <p:spPr>
           <a:xfrm>
-            <a:off x="3942207" y="4169664"/>
-            <a:ext cx="685800" cy="384048"/>
+            <a:off x="4331643" y="4169664"/>
+            <a:ext cx="685800" cy="475488"/>
           </a:xfrm>
           <a:prstGeom prst="rect">
             <a:avLst/>
@@ -15965,12 +16109,12 @@
         </p:nvSpPr>
         <p:spPr>
           <a:xfrm>
-            <a:off x="4850892" y="4169664"/>
-            <a:ext cx="685800" cy="384048"/>
+            <a:off x="5370141" y="4169664"/>
+            <a:ext cx="685800" cy="475488"/>
           </a:xfrm>
           <a:prstGeom prst="rect">
             <a:avLst>
-              <a:gd name="adj" fmla="val 9524"/>
+              <a:gd name="adj" fmla="val 7692"/>
             </a:avLst>
           </a:prstGeom>
           <a:solidFill>
@@ -15992,8 +16136,8 @@
         </p:nvSpPr>
         <p:spPr>
           <a:xfrm>
-            <a:off x="4850892" y="4169664"/>
-            <a:ext cx="685800" cy="384048"/>
+            <a:off x="5370141" y="4169664"/>
+            <a:ext cx="685800" cy="475488"/>
           </a:xfrm>
           <a:prstGeom prst="rect">
             <a:avLst/>
@@ -16031,12 +16175,12 @@
         </p:nvSpPr>
         <p:spPr>
           <a:xfrm>
-            <a:off x="5759577" y="4169664"/>
-            <a:ext cx="685800" cy="384048"/>
+            <a:off x="6408638" y="4169664"/>
+            <a:ext cx="685800" cy="475488"/>
           </a:xfrm>
           <a:prstGeom prst="rect">
             <a:avLst>
-              <a:gd name="adj" fmla="val 9524"/>
+              <a:gd name="adj" fmla="val 7692"/>
             </a:avLst>
           </a:prstGeom>
           <a:solidFill>
@@ -16058,8 +16202,8 @@
         </p:nvSpPr>
         <p:spPr>
           <a:xfrm>
-            <a:off x="5759577" y="4169664"/>
-            <a:ext cx="685800" cy="384048"/>
+            <a:off x="6408638" y="4169664"/>
+            <a:ext cx="685800" cy="475488"/>
           </a:xfrm>
           <a:prstGeom prst="rect">
             <a:avLst/>
@@ -16091,57 +16235,18 @@
       </p:sp>
       <p:sp>
         <p:nvSpPr>
-          <p:cNvPr id="47" name="Text 45"/>
-          <p:cNvSpPr/>
-          <p:nvPr/>
-        </p:nvSpPr>
-        <p:spPr>
-          <a:xfrm>
-            <a:off x="5759577" y="4572000"/>
-            <a:ext cx="685800" cy="219456"/>
-          </a:xfrm>
-          <a:prstGeom prst="rect">
-            <a:avLst/>
-          </a:prstGeom>
-          <a:noFill/>
-          <a:ln/>
-        </p:spPr>
-        <p:txBody>
-          <a:bodyPr wrap="square" lIns="0" tIns="0" rIns="0" bIns="0" rtlCol="0" anchor="t"/>
-          <a:lstStyle/>
-          <a:p>
-            <a:pPr algn="ctr" indent="0" marL="0">
-              <a:buNone/>
-            </a:pPr>
-            <a:r>
-              <a:rPr lang="en-US" sz="750" i="1" dirty="0">
-                <a:solidFill>
-                  <a:srgbClr val="94A3B8"/>
-                </a:solidFill>
-                <a:latin typeface="Calibri" pitchFamily="34" charset="0"/>
-                <a:ea typeface="Calibri" pitchFamily="34" charset="-122"/>
-                <a:cs typeface="Calibri" pitchFamily="34" charset="-120"/>
-              </a:rPr>
-              <a:t>/sh/</a:t>
-            </a:r>
-            <a:endParaRPr lang="en-US" sz="750" dirty="0"/>
-          </a:p>
-        </p:txBody>
-      </p:sp>
-      <p:sp>
-        <p:nvSpPr>
-          <p:cNvPr id="48" name="Shape 46"/>
-          <p:cNvSpPr/>
-          <p:nvPr/>
-        </p:nvSpPr>
-        <p:spPr>
-          <a:xfrm>
-            <a:off x="6668262" y="4169664"/>
-            <a:ext cx="685800" cy="384048"/>
+          <p:cNvPr id="47" name="Shape 45"/>
+          <p:cNvSpPr/>
+          <p:nvPr/>
+        </p:nvSpPr>
+        <p:spPr>
+          <a:xfrm>
+            <a:off x="7447135" y="4169664"/>
+            <a:ext cx="685800" cy="475488"/>
           </a:xfrm>
           <a:prstGeom prst="rect">
             <a:avLst>
-              <a:gd name="adj" fmla="val 9524"/>
+              <a:gd name="adj" fmla="val 7692"/>
             </a:avLst>
           </a:prstGeom>
           <a:solidFill>
@@ -16157,14 +16262,14 @@
       </p:sp>
       <p:sp>
         <p:nvSpPr>
-          <p:cNvPr id="49" name="Text 47"/>
-          <p:cNvSpPr/>
-          <p:nvPr/>
-        </p:nvSpPr>
-        <p:spPr>
-          <a:xfrm>
-            <a:off x="6668262" y="4169664"/>
-            <a:ext cx="685800" cy="384048"/>
+          <p:cNvPr id="48" name="Text 46"/>
+          <p:cNvSpPr/>
+          <p:nvPr/>
+        </p:nvSpPr>
+        <p:spPr>
+          <a:xfrm>
+            <a:off x="7447135" y="4169664"/>
+            <a:ext cx="685800" cy="475488"/>
           </a:xfrm>
           <a:prstGeom prst="rect">
             <a:avLst/>
@@ -16188,73 +16293,7 @@
                 <a:ea typeface="Trebuchet MS" pitchFamily="34" charset="-122"/>
                 <a:cs typeface="Trebuchet MS" pitchFamily="34" charset="-120"/>
               </a:rPr>
-              <a:t>io</a:t>
-            </a:r>
-            <a:endParaRPr lang="en-US" sz="900" dirty="0"/>
-          </a:p>
-        </p:txBody>
-      </p:sp>
-      <p:sp>
-        <p:nvSpPr>
-          <p:cNvPr id="50" name="Shape 48"/>
-          <p:cNvSpPr/>
-          <p:nvPr/>
-        </p:nvSpPr>
-        <p:spPr>
-          <a:xfrm>
-            <a:off x="7576947" y="4169664"/>
-            <a:ext cx="685800" cy="384048"/>
-          </a:xfrm>
-          <a:prstGeom prst="rect">
-            <a:avLst>
-              <a:gd name="adj" fmla="val 9524"/>
-            </a:avLst>
-          </a:prstGeom>
-          <a:solidFill>
-            <a:srgbClr val="FFFFFF"/>
-          </a:solidFill>
-          <a:ln w="12700">
-            <a:solidFill>
-              <a:srgbClr val="DB2777"/>
-            </a:solidFill>
-            <a:prstDash val="solid"/>
-          </a:ln>
-        </p:spPr>
-      </p:sp>
-      <p:sp>
-        <p:nvSpPr>
-          <p:cNvPr id="51" name="Text 49"/>
-          <p:cNvSpPr/>
-          <p:nvPr/>
-        </p:nvSpPr>
-        <p:spPr>
-          <a:xfrm>
-            <a:off x="7576947" y="4169664"/>
-            <a:ext cx="685800" cy="384048"/>
-          </a:xfrm>
-          <a:prstGeom prst="rect">
-            <a:avLst/>
-          </a:prstGeom>
-          <a:noFill/>
-          <a:ln/>
-        </p:spPr>
-        <p:txBody>
-          <a:bodyPr wrap="square" lIns="0" tIns="0" rIns="0" bIns="0" rtlCol="0" anchor="ctr"/>
-          <a:lstStyle/>
-          <a:p>
-            <a:pPr algn="ctr" indent="0" marL="0">
-              <a:buNone/>
-            </a:pPr>
-            <a:r>
-              <a:rPr lang="en-US" sz="900" b="1" dirty="0">
-                <a:solidFill>
-                  <a:srgbClr val="9D174D"/>
-                </a:solidFill>
-                <a:latin typeface="Trebuchet MS" pitchFamily="34" charset="0"/>
-                <a:ea typeface="Trebuchet MS" pitchFamily="34" charset="-122"/>
-                <a:cs typeface="Trebuchet MS" pitchFamily="34" charset="-120"/>
-              </a:rPr>
-              <a:t>n</a:t>
+              <a:t>ing</a:t>
             </a:r>
             <a:endParaRPr lang="en-US" sz="900" dirty="0"/>
           </a:p>
@@ -17162,7 +17201,7 @@
                 <a:ea typeface="Trebuchet MS" pitchFamily="34" charset="-122"/>
                 <a:cs typeface="Trebuchet MS" pitchFamily="34" charset="-120"/>
               </a:rPr>
-              <a:t>1</a:t>
+              <a:t>2</a:t>
             </a:r>
             <a:pPr algn="ctr" indent="0" marL="0">
               <a:buNone/>
@@ -17176,7 +17215,7 @@
                 <a:ea typeface="Trebuchet MS" pitchFamily="34" charset="-122"/>
                 <a:cs typeface="Trebuchet MS" pitchFamily="34" charset="-120"/>
               </a:rPr>
-              <a:t>  punctuation mark</a:t>
+              <a:t>  punctuation marks</a:t>
             </a:r>
             <a:endParaRPr lang="en-US" sz="2800" dirty="0"/>
           </a:p>
@@ -17611,7 +17650,7 @@
                 <a:ea typeface="Calibri" pitchFamily="34" charset="-122"/>
                 <a:cs typeface="Calibri" pitchFamily="34" charset="-120"/>
               </a:rPr>
-              <a:t> cuff helps with </a:t>
+              <a:t> in the machine spun smoothly; however, each </a:t>
             </a:r>
             <a:pPr algn="l" indent="0" marL="0">
               <a:buNone/>
@@ -17628,7 +17667,7 @@
                 <a:ea typeface="Calibri" pitchFamily="34" charset="-122"/>
                 <a:cs typeface="Calibri" pitchFamily="34" charset="-120"/>
               </a:rPr>
-              <a:t>rotation</a:t>
+              <a:t>rotatory</a:t>
             </a:r>
             <a:pPr algn="l" indent="0" marL="0">
               <a:buNone/>
@@ -17642,7 +17681,7 @@
                 <a:ea typeface="Calibri" pitchFamily="34" charset="-122"/>
                 <a:cs typeface="Calibri" pitchFamily="34" charset="-120"/>
               </a:rPr>
-              <a:t>, but </a:t>
+              <a:t> movement was carefully measured by the engineer, who also noted the </a:t>
             </a:r>
             <a:pPr algn="l" indent="0" marL="0">
               <a:buNone/>
@@ -17659,7 +17698,7 @@
                 <a:ea typeface="Calibri" pitchFamily="34" charset="-122"/>
                 <a:cs typeface="Calibri" pitchFamily="34" charset="-120"/>
               </a:rPr>
-              <a:t>rotating</a:t>
+              <a:t>co-rotating</a:t>
             </a:r>
             <a:pPr algn="l" indent="0" marL="0">
               <a:buNone/>
@@ -17673,7 +17712,7 @@
                 <a:ea typeface="Calibri" pitchFamily="34" charset="-122"/>
                 <a:cs typeface="Calibri" pitchFamily="34" charset="-120"/>
               </a:rPr>
-              <a:t> your arm too far can cause an injury.</a:t>
+              <a:t> parts.</a:t>
             </a:r>
             <a:endParaRPr lang="en-US" sz="1800" dirty="0"/>
           </a:p>
@@ -17956,7 +17995,7 @@
                 <a:ea typeface="Trebuchet MS" pitchFamily="34" charset="-122"/>
                 <a:cs typeface="Trebuchet MS" pitchFamily="34" charset="-120"/>
               </a:rPr>
-              <a:t>rotation</a:t>
+              <a:t>rotatory</a:t>
             </a:r>
             <a:endParaRPr lang="en-US" sz="1400" dirty="0"/>
           </a:p>
@@ -18084,7 +18123,7 @@
                 <a:ea typeface="Trebuchet MS" pitchFamily="34" charset="-122"/>
                 <a:cs typeface="Trebuchet MS" pitchFamily="34" charset="-120"/>
               </a:rPr>
-              <a:t>rotating</a:t>
+              <a:t>co-rotating</a:t>
             </a:r>
             <a:endParaRPr lang="en-US" sz="1400" dirty="0"/>
           </a:p>
@@ -19559,7 +19598,7 @@
                 <a:ea typeface="Calibri" pitchFamily="34" charset="-122"/>
                 <a:cs typeface="Calibri" pitchFamily="34" charset="-120"/>
               </a:rPr>
-              <a:t>to turn or spin</a:t>
+              <a:t>to turn or spin around</a:t>
             </a:r>
             <a:endParaRPr lang="en-US" sz="850" dirty="0"/>
           </a:p>
@@ -19710,7 +19749,7 @@
                 <a:ea typeface="Calibri" pitchFamily="34" charset="-122"/>
                 <a:cs typeface="Calibri" pitchFamily="34" charset="-120"/>
               </a:rPr>
-              <a:t>person or thing that does</a:t>
+              <a:t>a person or thing that does</a:t>
             </a:r>
             <a:endParaRPr lang="en-US" sz="850" dirty="0"/>
           </a:p>
@@ -20583,7 +20622,7 @@
                 <a:ea typeface="Calibri" pitchFamily="34" charset="-122"/>
                 <a:cs typeface="Calibri" pitchFamily="34" charset="-120"/>
               </a:rPr>
-              <a:t>to turn or spin</a:t>
+              <a:t>to turn or spin around</a:t>
             </a:r>
             <a:endParaRPr lang="en-US" sz="850" dirty="0"/>
           </a:p>
@@ -20734,7 +20773,7 @@
                 <a:ea typeface="Calibri" pitchFamily="34" charset="-122"/>
                 <a:cs typeface="Calibri" pitchFamily="34" charset="-120"/>
               </a:rPr>
-              <a:t>person or thing that does</a:t>
+              <a:t>a person or thing that does</a:t>
             </a:r>
             <a:endParaRPr lang="en-US" sz="850" dirty="0"/>
           </a:p>
@@ -21844,7 +21883,7 @@
                 <a:ea typeface="Calibri" pitchFamily="34" charset="-122"/>
                 <a:cs typeface="Calibri" pitchFamily="34" charset="-120"/>
               </a:rPr>
-              <a:t>to turn or spin</a:t>
+              <a:t>to turn or spin around</a:t>
             </a:r>
             <a:endParaRPr lang="en-US" sz="850" dirty="0"/>
           </a:p>
@@ -21995,7 +22034,7 @@
                 <a:ea typeface="Calibri" pitchFamily="34" charset="-122"/>
                 <a:cs typeface="Calibri" pitchFamily="34" charset="-120"/>
               </a:rPr>
-              <a:t>person or thing that does</a:t>
+              <a:t>a person or thing that does</a:t>
             </a:r>
             <a:endParaRPr lang="en-US" sz="850" dirty="0"/>
           </a:p>
@@ -23284,7 +23323,7 @@
                 <a:ea typeface="Trebuchet MS" pitchFamily="34" charset="-122"/>
                 <a:cs typeface="Trebuchet MS" pitchFamily="34" charset="-120"/>
               </a:rPr>
-              <a:t>rotation</a:t>
+              <a:t>rotatory</a:t>
             </a:r>
             <a:endParaRPr lang="en-US" sz="2800" dirty="0"/>
           </a:p>
@@ -24111,7 +24150,7 @@
                 <a:ea typeface="Trebuchet MS" pitchFamily="34" charset="-122"/>
                 <a:cs typeface="Trebuchet MS" pitchFamily="34" charset="-120"/>
               </a:rPr>
-              <a:t>rotation</a:t>
+              <a:t>rotatory</a:t>
             </a:r>
             <a:endParaRPr lang="en-US" sz="2800" dirty="0"/>
           </a:p>
@@ -24289,7 +24328,7 @@
                 <a:ea typeface="Calibri" pitchFamily="34" charset="-122"/>
                 <a:cs typeface="Calibri" pitchFamily="34" charset="-120"/>
               </a:rPr>
-              <a:t>to turn or spin</a:t>
+              <a:t>to turn or spin around</a:t>
             </a:r>
             <a:endParaRPr lang="en-US" sz="850" dirty="0"/>
           </a:p>
@@ -24401,7 +24440,7 @@
                 <a:ea typeface="Trebuchet MS" pitchFamily="34" charset="-122"/>
                 <a:cs typeface="Trebuchet MS" pitchFamily="34" charset="-120"/>
               </a:rPr>
-              <a:t>ion</a:t>
+              <a:t>ory</a:t>
             </a:r>
             <a:endParaRPr lang="en-US" sz="1300" dirty="0"/>
           </a:p>
@@ -24440,7 +24479,7 @@
                 <a:ea typeface="Calibri" pitchFamily="34" charset="-122"/>
                 <a:cs typeface="Calibri" pitchFamily="34" charset="-120"/>
               </a:rPr>
-              <a:t>act or result of</a:t>
+              <a:t>relating to or characterised by</a:t>
             </a:r>
             <a:endParaRPr lang="en-US" sz="850" dirty="0"/>
           </a:p>
@@ -25854,7 +25893,7 @@
                 <a:ea typeface="Trebuchet MS" pitchFamily="34" charset="-122"/>
                 <a:cs typeface="Trebuchet MS" pitchFamily="34" charset="-120"/>
               </a:rPr>
-              <a:t>rotation</a:t>
+              <a:t>rotatory</a:t>
             </a:r>
             <a:endParaRPr lang="en-US" sz="2800" dirty="0"/>
           </a:p>
@@ -26032,7 +26071,7 @@
                 <a:ea typeface="Calibri" pitchFamily="34" charset="-122"/>
                 <a:cs typeface="Calibri" pitchFamily="34" charset="-120"/>
               </a:rPr>
-              <a:t>to turn or spin</a:t>
+              <a:t>to turn or spin around</a:t>
             </a:r>
             <a:endParaRPr lang="en-US" sz="850" dirty="0"/>
           </a:p>
@@ -26144,7 +26183,7 @@
                 <a:ea typeface="Trebuchet MS" pitchFamily="34" charset="-122"/>
                 <a:cs typeface="Trebuchet MS" pitchFamily="34" charset="-120"/>
               </a:rPr>
-              <a:t>ion</a:t>
+              <a:t>ory</a:t>
             </a:r>
             <a:endParaRPr lang="en-US" sz="1300" dirty="0"/>
           </a:p>
@@ -26183,7 +26222,7 @@
                 <a:ea typeface="Calibri" pitchFamily="34" charset="-122"/>
                 <a:cs typeface="Calibri" pitchFamily="34" charset="-120"/>
               </a:rPr>
-              <a:t>act or result of</a:t>
+              <a:t>relating to or characterised by</a:t>
             </a:r>
             <a:endParaRPr lang="en-US" sz="850" dirty="0"/>
           </a:p>
@@ -26290,8 +26329,8 @@
         </p:nvSpPr>
         <p:spPr>
           <a:xfrm>
-            <a:off x="2313432" y="3364992"/>
-            <a:ext cx="1645920" cy="475488"/>
+            <a:off x="1975104" y="3364992"/>
+            <a:ext cx="1554480" cy="475488"/>
           </a:xfrm>
           <a:prstGeom prst="rect">
             <a:avLst>
@@ -26317,8 +26356,8 @@
         </p:nvSpPr>
         <p:spPr>
           <a:xfrm>
-            <a:off x="2313432" y="3364992"/>
-            <a:ext cx="1645920" cy="475488"/>
+            <a:off x="1975104" y="3364992"/>
+            <a:ext cx="1554480" cy="475488"/>
           </a:xfrm>
           <a:prstGeom prst="rect">
             <a:avLst/>
@@ -26356,8 +26395,8 @@
         </p:nvSpPr>
         <p:spPr>
           <a:xfrm>
-            <a:off x="3959352" y="3364992"/>
-            <a:ext cx="411480" cy="475488"/>
+            <a:off x="3529584" y="3364992"/>
+            <a:ext cx="73152" cy="475488"/>
           </a:xfrm>
           <a:prstGeom prst="rect">
             <a:avLst/>
@@ -26395,8 +26434,8 @@
         </p:nvSpPr>
         <p:spPr>
           <a:xfrm>
-            <a:off x="4370832" y="3364992"/>
-            <a:ext cx="1645920" cy="475488"/>
+            <a:off x="3602736" y="3364992"/>
+            <a:ext cx="1554480" cy="475488"/>
           </a:xfrm>
           <a:prstGeom prst="rect">
             <a:avLst>
@@ -26422,8 +26461,8 @@
         </p:nvSpPr>
         <p:spPr>
           <a:xfrm>
-            <a:off x="4370832" y="3364992"/>
-            <a:ext cx="1645920" cy="475488"/>
+            <a:off x="3602736" y="3364992"/>
+            <a:ext cx="1554480" cy="475488"/>
           </a:xfrm>
           <a:prstGeom prst="rect">
             <a:avLst/>
@@ -26461,8 +26500,8 @@
         </p:nvSpPr>
         <p:spPr>
           <a:xfrm>
-            <a:off x="6016752" y="3364992"/>
-            <a:ext cx="411480" cy="475488"/>
+            <a:off x="5157216" y="3364992"/>
+            <a:ext cx="73152" cy="475488"/>
           </a:xfrm>
           <a:prstGeom prst="rect">
             <a:avLst/>
@@ -26500,8 +26539,8 @@
         </p:nvSpPr>
         <p:spPr>
           <a:xfrm>
-            <a:off x="6428232" y="3364992"/>
-            <a:ext cx="1645920" cy="475488"/>
+            <a:off x="5230368" y="3364992"/>
+            <a:ext cx="1554480" cy="475488"/>
           </a:xfrm>
           <a:prstGeom prst="rect">
             <a:avLst>
@@ -26527,8 +26566,8 @@
         </p:nvSpPr>
         <p:spPr>
           <a:xfrm>
-            <a:off x="6428232" y="3364992"/>
-            <a:ext cx="1645920" cy="475488"/>
+            <a:off x="5230368" y="3364992"/>
+            <a:ext cx="1554480" cy="475488"/>
           </a:xfrm>
           <a:prstGeom prst="rect">
             <a:avLst/>
@@ -26552,7 +26591,7 @@
                 <a:ea typeface="Trebuchet MS" pitchFamily="34" charset="-122"/>
                 <a:cs typeface="Trebuchet MS" pitchFamily="34" charset="-120"/>
               </a:rPr>
-              <a:t>tion</a:t>
+              <a:t>to</a:t>
             </a:r>
             <a:endParaRPr lang="en-US" sz="1400" dirty="0"/>
           </a:p>
@@ -26560,7 +26599,112 @@
       </p:sp>
       <p:sp>
         <p:nvSpPr>
-          <p:cNvPr id="34" name="Shape 32"/>
+          <p:cNvPr id="34" name="Text 32"/>
+          <p:cNvSpPr/>
+          <p:nvPr/>
+        </p:nvSpPr>
+        <p:spPr>
+          <a:xfrm>
+            <a:off x="6784848" y="3364992"/>
+            <a:ext cx="73152" cy="475488"/>
+          </a:xfrm>
+          <a:prstGeom prst="rect">
+            <a:avLst/>
+          </a:prstGeom>
+          <a:noFill/>
+          <a:ln/>
+        </p:spPr>
+        <p:txBody>
+          <a:bodyPr wrap="square" lIns="0" tIns="0" rIns="0" bIns="0" rtlCol="0" anchor="ctr"/>
+          <a:lstStyle/>
+          <a:p>
+            <a:pPr algn="ctr" indent="0" marL="0">
+              <a:buNone/>
+            </a:pPr>
+            <a:r>
+              <a:rPr lang="en-US" sz="1600" b="1" dirty="0">
+                <a:solidFill>
+                  <a:srgbClr val="0D9488"/>
+                </a:solidFill>
+                <a:latin typeface="Trebuchet MS" pitchFamily="34" charset="0"/>
+                <a:ea typeface="Trebuchet MS" pitchFamily="34" charset="-122"/>
+                <a:cs typeface="Trebuchet MS" pitchFamily="34" charset="-120"/>
+              </a:rPr>
+              <a:t>·</a:t>
+            </a:r>
+            <a:endParaRPr lang="en-US" sz="1600" dirty="0"/>
+          </a:p>
+        </p:txBody>
+      </p:sp>
+      <p:sp>
+        <p:nvSpPr>
+          <p:cNvPr id="35" name="Shape 33"/>
+          <p:cNvSpPr/>
+          <p:nvPr/>
+        </p:nvSpPr>
+        <p:spPr>
+          <a:xfrm>
+            <a:off x="6858000" y="3364992"/>
+            <a:ext cx="1554480" cy="475488"/>
+          </a:xfrm>
+          <a:prstGeom prst="rect">
+            <a:avLst>
+              <a:gd name="adj" fmla="val 9615"/>
+            </a:avLst>
+          </a:prstGeom>
+          <a:solidFill>
+            <a:srgbClr val="FFFFFF"/>
+          </a:solidFill>
+          <a:ln w="12700">
+            <a:solidFill>
+              <a:srgbClr val="0D9488"/>
+            </a:solidFill>
+            <a:prstDash val="solid"/>
+          </a:ln>
+        </p:spPr>
+      </p:sp>
+      <p:sp>
+        <p:nvSpPr>
+          <p:cNvPr id="36" name="Text 34"/>
+          <p:cNvSpPr/>
+          <p:nvPr/>
+        </p:nvSpPr>
+        <p:spPr>
+          <a:xfrm>
+            <a:off x="6858000" y="3364992"/>
+            <a:ext cx="1554480" cy="475488"/>
+          </a:xfrm>
+          <a:prstGeom prst="rect">
+            <a:avLst/>
+          </a:prstGeom>
+          <a:noFill/>
+          <a:ln/>
+        </p:spPr>
+        <p:txBody>
+          <a:bodyPr wrap="square" lIns="0" tIns="0" rIns="0" bIns="0" rtlCol="0" anchor="ctr"/>
+          <a:lstStyle/>
+          <a:p>
+            <a:pPr algn="ctr" indent="0" marL="0">
+              <a:buNone/>
+            </a:pPr>
+            <a:r>
+              <a:rPr lang="en-US" sz="1400" b="1" dirty="0">
+                <a:solidFill>
+                  <a:srgbClr val="0D9488"/>
+                </a:solidFill>
+                <a:latin typeface="Trebuchet MS" pitchFamily="34" charset="0"/>
+                <a:ea typeface="Trebuchet MS" pitchFamily="34" charset="-122"/>
+                <a:cs typeface="Trebuchet MS" pitchFamily="34" charset="-120"/>
+              </a:rPr>
+              <a:t>ry</a:t>
+            </a:r>
+            <a:endParaRPr lang="en-US" sz="1400" dirty="0"/>
+          </a:p>
+        </p:txBody>
+      </p:sp>
+      <p:sp>
+        <p:nvSpPr>
+          <p:cNvPr id="37" name="Shape 35"/>
           <p:cNvSpPr/>
           <p:nvPr/>
         </p:nvSpPr>
@@ -26587,7 +26731,7 @@
       </p:sp>
       <p:sp>
         <p:nvSpPr>
-          <p:cNvPr id="35" name="Text 33"/>
+          <p:cNvPr id="38" name="Text 36"/>
           <p:cNvSpPr/>
           <p:nvPr/>
         </p:nvSpPr>
@@ -26626,7 +26770,7 @@
       </p:sp>
       <p:sp>
         <p:nvSpPr>
-          <p:cNvPr id="36" name="Shape 34"/>
+          <p:cNvPr id="39" name="Shape 37"/>
           <p:cNvSpPr/>
           <p:nvPr/>
         </p:nvSpPr>
@@ -26653,7 +26797,7 @@
       </p:sp>
       <p:sp>
         <p:nvSpPr>
-          <p:cNvPr id="37" name="Text 35"/>
+          <p:cNvPr id="40" name="Text 38"/>
           <p:cNvSpPr/>
           <p:nvPr/>
         </p:nvSpPr>
@@ -27115,7 +27259,7 @@
                 <a:ea typeface="Trebuchet MS" pitchFamily="34" charset="-122"/>
                 <a:cs typeface="Trebuchet MS" pitchFamily="34" charset="-120"/>
               </a:rPr>
-              <a:t>rotation</a:t>
+              <a:t>rotatory</a:t>
             </a:r>
             <a:endParaRPr lang="en-US" sz="2800" dirty="0"/>
           </a:p>
@@ -27293,7 +27437,7 @@
                 <a:ea typeface="Calibri" pitchFamily="34" charset="-122"/>
                 <a:cs typeface="Calibri" pitchFamily="34" charset="-120"/>
               </a:rPr>
-              <a:t>to turn or spin</a:t>
+              <a:t>to turn or spin around</a:t>
             </a:r>
             <a:endParaRPr lang="en-US" sz="850" dirty="0"/>
           </a:p>
@@ -27405,7 +27549,7 @@
                 <a:ea typeface="Trebuchet MS" pitchFamily="34" charset="-122"/>
                 <a:cs typeface="Trebuchet MS" pitchFamily="34" charset="-120"/>
               </a:rPr>
-              <a:t>ion</a:t>
+              <a:t>ory</a:t>
             </a:r>
             <a:endParaRPr lang="en-US" sz="1300" dirty="0"/>
           </a:p>
@@ -27444,7 +27588,7 @@
                 <a:ea typeface="Calibri" pitchFamily="34" charset="-122"/>
                 <a:cs typeface="Calibri" pitchFamily="34" charset="-120"/>
               </a:rPr>
-              <a:t>act or result of</a:t>
+              <a:t>relating to or characterised by</a:t>
             </a:r>
             <a:endParaRPr lang="en-US" sz="850" dirty="0"/>
           </a:p>
@@ -27551,8 +27695,8 @@
         </p:nvSpPr>
         <p:spPr>
           <a:xfrm>
-            <a:off x="2313432" y="3364992"/>
-            <a:ext cx="1645920" cy="475488"/>
+            <a:off x="1975104" y="3364992"/>
+            <a:ext cx="1554480" cy="475488"/>
           </a:xfrm>
           <a:prstGeom prst="rect">
             <a:avLst>
@@ -27578,8 +27722,8 @@
         </p:nvSpPr>
         <p:spPr>
           <a:xfrm>
-            <a:off x="2313432" y="3364992"/>
-            <a:ext cx="1645920" cy="475488"/>
+            <a:off x="1975104" y="3364992"/>
+            <a:ext cx="1554480" cy="475488"/>
           </a:xfrm>
           <a:prstGeom prst="rect">
             <a:avLst/>
@@ -27617,8 +27761,8 @@
         </p:nvSpPr>
         <p:spPr>
           <a:xfrm>
-            <a:off x="3959352" y="3364992"/>
-            <a:ext cx="411480" cy="475488"/>
+            <a:off x="3529584" y="3364992"/>
+            <a:ext cx="73152" cy="475488"/>
           </a:xfrm>
           <a:prstGeom prst="rect">
             <a:avLst/>
@@ -27656,8 +27800,8 @@
         </p:nvSpPr>
         <p:spPr>
           <a:xfrm>
-            <a:off x="4370832" y="3364992"/>
-            <a:ext cx="1645920" cy="475488"/>
+            <a:off x="3602736" y="3364992"/>
+            <a:ext cx="1554480" cy="475488"/>
           </a:xfrm>
           <a:prstGeom prst="rect">
             <a:avLst>
@@ -27683,8 +27827,8 @@
         </p:nvSpPr>
         <p:spPr>
           <a:xfrm>
-            <a:off x="4370832" y="3364992"/>
-            <a:ext cx="1645920" cy="475488"/>
+            <a:off x="3602736" y="3364992"/>
+            <a:ext cx="1554480" cy="475488"/>
           </a:xfrm>
           <a:prstGeom prst="rect">
             <a:avLst/>
@@ -27722,8 +27866,8 @@
         </p:nvSpPr>
         <p:spPr>
           <a:xfrm>
-            <a:off x="6016752" y="3364992"/>
-            <a:ext cx="411480" cy="475488"/>
+            <a:off x="5157216" y="3364992"/>
+            <a:ext cx="73152" cy="475488"/>
           </a:xfrm>
           <a:prstGeom prst="rect">
             <a:avLst/>
@@ -27761,8 +27905,8 @@
         </p:nvSpPr>
         <p:spPr>
           <a:xfrm>
-            <a:off x="6428232" y="3364992"/>
-            <a:ext cx="1645920" cy="475488"/>
+            <a:off x="5230368" y="3364992"/>
+            <a:ext cx="1554480" cy="475488"/>
           </a:xfrm>
           <a:prstGeom prst="rect">
             <a:avLst>
@@ -27788,8 +27932,8 @@
         </p:nvSpPr>
         <p:spPr>
           <a:xfrm>
-            <a:off x="6428232" y="3364992"/>
-            <a:ext cx="1645920" cy="475488"/>
+            <a:off x="5230368" y="3364992"/>
+            <a:ext cx="1554480" cy="475488"/>
           </a:xfrm>
           <a:prstGeom prst="rect">
             <a:avLst/>
@@ -27813,7 +27957,7 @@
                 <a:ea typeface="Trebuchet MS" pitchFamily="34" charset="-122"/>
                 <a:cs typeface="Trebuchet MS" pitchFamily="34" charset="-120"/>
               </a:rPr>
-              <a:t>tion</a:t>
+              <a:t>to</a:t>
             </a:r>
             <a:endParaRPr lang="en-US" sz="1400" dirty="0"/>
           </a:p>
@@ -27821,7 +27965,112 @@
       </p:sp>
       <p:sp>
         <p:nvSpPr>
-          <p:cNvPr id="34" name="Shape 32"/>
+          <p:cNvPr id="34" name="Text 32"/>
+          <p:cNvSpPr/>
+          <p:nvPr/>
+        </p:nvSpPr>
+        <p:spPr>
+          <a:xfrm>
+            <a:off x="6784848" y="3364992"/>
+            <a:ext cx="73152" cy="475488"/>
+          </a:xfrm>
+          <a:prstGeom prst="rect">
+            <a:avLst/>
+          </a:prstGeom>
+          <a:noFill/>
+          <a:ln/>
+        </p:spPr>
+        <p:txBody>
+          <a:bodyPr wrap="square" lIns="0" tIns="0" rIns="0" bIns="0" rtlCol="0" anchor="ctr"/>
+          <a:lstStyle/>
+          <a:p>
+            <a:pPr algn="ctr" indent="0" marL="0">
+              <a:buNone/>
+            </a:pPr>
+            <a:r>
+              <a:rPr lang="en-US" sz="1600" b="1" dirty="0">
+                <a:solidFill>
+                  <a:srgbClr val="0D9488"/>
+                </a:solidFill>
+                <a:latin typeface="Trebuchet MS" pitchFamily="34" charset="0"/>
+                <a:ea typeface="Trebuchet MS" pitchFamily="34" charset="-122"/>
+                <a:cs typeface="Trebuchet MS" pitchFamily="34" charset="-120"/>
+              </a:rPr>
+              <a:t>·</a:t>
+            </a:r>
+            <a:endParaRPr lang="en-US" sz="1600" dirty="0"/>
+          </a:p>
+        </p:txBody>
+      </p:sp>
+      <p:sp>
+        <p:nvSpPr>
+          <p:cNvPr id="35" name="Shape 33"/>
+          <p:cNvSpPr/>
+          <p:nvPr/>
+        </p:nvSpPr>
+        <p:spPr>
+          <a:xfrm>
+            <a:off x="6858000" y="3364992"/>
+            <a:ext cx="1554480" cy="475488"/>
+          </a:xfrm>
+          <a:prstGeom prst="rect">
+            <a:avLst>
+              <a:gd name="adj" fmla="val 9615"/>
+            </a:avLst>
+          </a:prstGeom>
+          <a:solidFill>
+            <a:srgbClr val="FFFFFF"/>
+          </a:solidFill>
+          <a:ln w="12700">
+            <a:solidFill>
+              <a:srgbClr val="0D9488"/>
+            </a:solidFill>
+            <a:prstDash val="solid"/>
+          </a:ln>
+        </p:spPr>
+      </p:sp>
+      <p:sp>
+        <p:nvSpPr>
+          <p:cNvPr id="36" name="Text 34"/>
+          <p:cNvSpPr/>
+          <p:nvPr/>
+        </p:nvSpPr>
+        <p:spPr>
+          <a:xfrm>
+            <a:off x="6858000" y="3364992"/>
+            <a:ext cx="1554480" cy="475488"/>
+          </a:xfrm>
+          <a:prstGeom prst="rect">
+            <a:avLst/>
+          </a:prstGeom>
+          <a:noFill/>
+          <a:ln/>
+        </p:spPr>
+        <p:txBody>
+          <a:bodyPr wrap="square" lIns="0" tIns="0" rIns="0" bIns="0" rtlCol="0" anchor="ctr"/>
+          <a:lstStyle/>
+          <a:p>
+            <a:pPr algn="ctr" indent="0" marL="0">
+              <a:buNone/>
+            </a:pPr>
+            <a:r>
+              <a:rPr lang="en-US" sz="1400" b="1" dirty="0">
+                <a:solidFill>
+                  <a:srgbClr val="0D9488"/>
+                </a:solidFill>
+                <a:latin typeface="Trebuchet MS" pitchFamily="34" charset="0"/>
+                <a:ea typeface="Trebuchet MS" pitchFamily="34" charset="-122"/>
+                <a:cs typeface="Trebuchet MS" pitchFamily="34" charset="-120"/>
+              </a:rPr>
+              <a:t>ry</a:t>
+            </a:r>
+            <a:endParaRPr lang="en-US" sz="1400" dirty="0"/>
+          </a:p>
+        </p:txBody>
+      </p:sp>
+      <p:sp>
+        <p:nvSpPr>
+          <p:cNvPr id="37" name="Shape 35"/>
           <p:cNvSpPr/>
           <p:nvPr/>
         </p:nvSpPr>
@@ -27848,7 +28097,7 @@
       </p:sp>
       <p:sp>
         <p:nvSpPr>
-          <p:cNvPr id="35" name="Text 33"/>
+          <p:cNvPr id="38" name="Text 36"/>
           <p:cNvSpPr/>
           <p:nvPr/>
         </p:nvSpPr>
@@ -27887,18 +28136,18 @@
       </p:sp>
       <p:sp>
         <p:nvSpPr>
-          <p:cNvPr id="36" name="Shape 34"/>
+          <p:cNvPr id="39" name="Shape 37"/>
           <p:cNvSpPr/>
           <p:nvPr/>
         </p:nvSpPr>
         <p:spPr>
           <a:xfrm>
             <a:off x="1874520" y="4096512"/>
-            <a:ext cx="6903720" cy="804672"/>
+            <a:ext cx="6903720" cy="658368"/>
           </a:xfrm>
           <a:prstGeom prst="rect">
             <a:avLst>
-              <a:gd name="adj" fmla="val 6818"/>
+              <a:gd name="adj" fmla="val 8333"/>
             </a:avLst>
           </a:prstGeom>
           <a:solidFill>
@@ -27914,18 +28163,18 @@
       </p:sp>
       <p:sp>
         <p:nvSpPr>
-          <p:cNvPr id="37" name="Shape 35"/>
-          <p:cNvSpPr/>
-          <p:nvPr/>
-        </p:nvSpPr>
-        <p:spPr>
-          <a:xfrm>
-            <a:off x="2124837" y="4169664"/>
-            <a:ext cx="685800" cy="384048"/>
+          <p:cNvPr id="40" name="Shape 38"/>
+          <p:cNvSpPr/>
+          <p:nvPr/>
+        </p:nvSpPr>
+        <p:spPr>
+          <a:xfrm>
+            <a:off x="2023872" y="4169664"/>
+            <a:ext cx="685800" cy="475488"/>
           </a:xfrm>
           <a:prstGeom prst="rect">
             <a:avLst>
-              <a:gd name="adj" fmla="val 9524"/>
+              <a:gd name="adj" fmla="val 7692"/>
             </a:avLst>
           </a:prstGeom>
           <a:solidFill>
@@ -27941,14 +28190,14 @@
       </p:sp>
       <p:sp>
         <p:nvSpPr>
-          <p:cNvPr id="38" name="Text 36"/>
-          <p:cNvSpPr/>
-          <p:nvPr/>
-        </p:nvSpPr>
-        <p:spPr>
-          <a:xfrm>
-            <a:off x="2124837" y="4169664"/>
-            <a:ext cx="685800" cy="384048"/>
+          <p:cNvPr id="41" name="Text 39"/>
+          <p:cNvSpPr/>
+          <p:nvPr/>
+        </p:nvSpPr>
+        <p:spPr>
+          <a:xfrm>
+            <a:off x="2023872" y="4169664"/>
+            <a:ext cx="685800" cy="475488"/>
           </a:xfrm>
           <a:prstGeom prst="rect">
             <a:avLst/>
@@ -27980,18 +28229,18 @@
       </p:sp>
       <p:sp>
         <p:nvSpPr>
-          <p:cNvPr id="39" name="Shape 37"/>
-          <p:cNvSpPr/>
-          <p:nvPr/>
-        </p:nvSpPr>
-        <p:spPr>
-          <a:xfrm>
-            <a:off x="3033522" y="4169664"/>
-            <a:ext cx="685800" cy="384048"/>
+          <p:cNvPr id="42" name="Shape 40"/>
+          <p:cNvSpPr/>
+          <p:nvPr/>
+        </p:nvSpPr>
+        <p:spPr>
+          <a:xfrm>
+            <a:off x="2831592" y="4169664"/>
+            <a:ext cx="685800" cy="475488"/>
           </a:xfrm>
           <a:prstGeom prst="rect">
             <a:avLst>
-              <a:gd name="adj" fmla="val 9524"/>
+              <a:gd name="adj" fmla="val 7692"/>
             </a:avLst>
           </a:prstGeom>
           <a:solidFill>
@@ -28007,14 +28256,14 @@
       </p:sp>
       <p:sp>
         <p:nvSpPr>
-          <p:cNvPr id="40" name="Text 38"/>
-          <p:cNvSpPr/>
-          <p:nvPr/>
-        </p:nvSpPr>
-        <p:spPr>
-          <a:xfrm>
-            <a:off x="3033522" y="4169664"/>
-            <a:ext cx="685800" cy="384048"/>
+          <p:cNvPr id="43" name="Text 41"/>
+          <p:cNvSpPr/>
+          <p:nvPr/>
+        </p:nvSpPr>
+        <p:spPr>
+          <a:xfrm>
+            <a:off x="2831592" y="4169664"/>
+            <a:ext cx="685800" cy="475488"/>
           </a:xfrm>
           <a:prstGeom prst="rect">
             <a:avLst/>
@@ -28046,18 +28295,18 @@
       </p:sp>
       <p:sp>
         <p:nvSpPr>
-          <p:cNvPr id="41" name="Shape 39"/>
-          <p:cNvSpPr/>
-          <p:nvPr/>
-        </p:nvSpPr>
-        <p:spPr>
-          <a:xfrm>
-            <a:off x="3942207" y="4169664"/>
-            <a:ext cx="685800" cy="384048"/>
+          <p:cNvPr id="44" name="Shape 42"/>
+          <p:cNvSpPr/>
+          <p:nvPr/>
+        </p:nvSpPr>
+        <p:spPr>
+          <a:xfrm>
+            <a:off x="3639312" y="4169664"/>
+            <a:ext cx="685800" cy="475488"/>
           </a:xfrm>
           <a:prstGeom prst="rect">
             <a:avLst>
-              <a:gd name="adj" fmla="val 9524"/>
+              <a:gd name="adj" fmla="val 7692"/>
             </a:avLst>
           </a:prstGeom>
           <a:solidFill>
@@ -28073,14 +28322,14 @@
       </p:sp>
       <p:sp>
         <p:nvSpPr>
-          <p:cNvPr id="42" name="Text 40"/>
-          <p:cNvSpPr/>
-          <p:nvPr/>
-        </p:nvSpPr>
-        <p:spPr>
-          <a:xfrm>
-            <a:off x="3942207" y="4169664"/>
-            <a:ext cx="685800" cy="384048"/>
+          <p:cNvPr id="45" name="Text 43"/>
+          <p:cNvSpPr/>
+          <p:nvPr/>
+        </p:nvSpPr>
+        <p:spPr>
+          <a:xfrm>
+            <a:off x="3639312" y="4169664"/>
+            <a:ext cx="685800" cy="475488"/>
           </a:xfrm>
           <a:prstGeom prst="rect">
             <a:avLst/>
@@ -28112,18 +28361,18 @@
       </p:sp>
       <p:sp>
         <p:nvSpPr>
-          <p:cNvPr id="43" name="Shape 41"/>
-          <p:cNvSpPr/>
-          <p:nvPr/>
-        </p:nvSpPr>
-        <p:spPr>
-          <a:xfrm>
-            <a:off x="4850892" y="4169664"/>
-            <a:ext cx="685800" cy="384048"/>
+          <p:cNvPr id="46" name="Shape 44"/>
+          <p:cNvSpPr/>
+          <p:nvPr/>
+        </p:nvSpPr>
+        <p:spPr>
+          <a:xfrm>
+            <a:off x="4447032" y="4169664"/>
+            <a:ext cx="685800" cy="475488"/>
           </a:xfrm>
           <a:prstGeom prst="rect">
             <a:avLst>
-              <a:gd name="adj" fmla="val 9524"/>
+              <a:gd name="adj" fmla="val 7692"/>
             </a:avLst>
           </a:prstGeom>
           <a:solidFill>
@@ -28139,14 +28388,14 @@
       </p:sp>
       <p:sp>
         <p:nvSpPr>
-          <p:cNvPr id="44" name="Text 42"/>
-          <p:cNvSpPr/>
-          <p:nvPr/>
-        </p:nvSpPr>
-        <p:spPr>
-          <a:xfrm>
-            <a:off x="4850892" y="4169664"/>
-            <a:ext cx="685800" cy="384048"/>
+          <p:cNvPr id="47" name="Text 45"/>
+          <p:cNvSpPr/>
+          <p:nvPr/>
+        </p:nvSpPr>
+        <p:spPr>
+          <a:xfrm>
+            <a:off x="4447032" y="4169664"/>
+            <a:ext cx="685800" cy="475488"/>
           </a:xfrm>
           <a:prstGeom prst="rect">
             <a:avLst/>
@@ -28178,18 +28427,18 @@
       </p:sp>
       <p:sp>
         <p:nvSpPr>
-          <p:cNvPr id="45" name="Shape 43"/>
-          <p:cNvSpPr/>
-          <p:nvPr/>
-        </p:nvSpPr>
-        <p:spPr>
-          <a:xfrm>
-            <a:off x="5759577" y="4169664"/>
-            <a:ext cx="685800" cy="384048"/>
+          <p:cNvPr id="48" name="Shape 46"/>
+          <p:cNvSpPr/>
+          <p:nvPr/>
+        </p:nvSpPr>
+        <p:spPr>
+          <a:xfrm>
+            <a:off x="5254752" y="4169664"/>
+            <a:ext cx="685800" cy="475488"/>
           </a:xfrm>
           <a:prstGeom prst="rect">
             <a:avLst>
-              <a:gd name="adj" fmla="val 9524"/>
+              <a:gd name="adj" fmla="val 7692"/>
             </a:avLst>
           </a:prstGeom>
           <a:solidFill>
@@ -28205,14 +28454,14 @@
       </p:sp>
       <p:sp>
         <p:nvSpPr>
-          <p:cNvPr id="46" name="Text 44"/>
-          <p:cNvSpPr/>
-          <p:nvPr/>
-        </p:nvSpPr>
-        <p:spPr>
-          <a:xfrm>
-            <a:off x="5759577" y="4169664"/>
-            <a:ext cx="685800" cy="384048"/>
+          <p:cNvPr id="49" name="Text 47"/>
+          <p:cNvSpPr/>
+          <p:nvPr/>
+        </p:nvSpPr>
+        <p:spPr>
+          <a:xfrm>
+            <a:off x="5254752" y="4169664"/>
+            <a:ext cx="685800" cy="475488"/>
           </a:xfrm>
           <a:prstGeom prst="rect">
             <a:avLst/>
@@ -28244,57 +28493,18 @@
       </p:sp>
       <p:sp>
         <p:nvSpPr>
-          <p:cNvPr id="47" name="Text 45"/>
-          <p:cNvSpPr/>
-          <p:nvPr/>
-        </p:nvSpPr>
-        <p:spPr>
-          <a:xfrm>
-            <a:off x="5759577" y="4572000"/>
-            <a:ext cx="685800" cy="219456"/>
-          </a:xfrm>
-          <a:prstGeom prst="rect">
-            <a:avLst/>
-          </a:prstGeom>
-          <a:noFill/>
-          <a:ln/>
-        </p:spPr>
-        <p:txBody>
-          <a:bodyPr wrap="square" lIns="0" tIns="0" rIns="0" bIns="0" rtlCol="0" anchor="t"/>
-          <a:lstStyle/>
-          <a:p>
-            <a:pPr algn="ctr" indent="0" marL="0">
-              <a:buNone/>
-            </a:pPr>
-            <a:r>
-              <a:rPr lang="en-US" sz="750" i="1" dirty="0">
-                <a:solidFill>
-                  <a:srgbClr val="94A3B8"/>
-                </a:solidFill>
-                <a:latin typeface="Calibri" pitchFamily="34" charset="0"/>
-                <a:ea typeface="Calibri" pitchFamily="34" charset="-122"/>
-                <a:cs typeface="Calibri" pitchFamily="34" charset="-120"/>
-              </a:rPr>
-              <a:t>/sh/</a:t>
-            </a:r>
-            <a:endParaRPr lang="en-US" sz="750" dirty="0"/>
-          </a:p>
-        </p:txBody>
-      </p:sp>
-      <p:sp>
-        <p:nvSpPr>
-          <p:cNvPr id="48" name="Shape 46"/>
-          <p:cNvSpPr/>
-          <p:nvPr/>
-        </p:nvSpPr>
-        <p:spPr>
-          <a:xfrm>
-            <a:off x="6668262" y="4169664"/>
-            <a:ext cx="685800" cy="384048"/>
+          <p:cNvPr id="50" name="Shape 48"/>
+          <p:cNvSpPr/>
+          <p:nvPr/>
+        </p:nvSpPr>
+        <p:spPr>
+          <a:xfrm>
+            <a:off x="6062472" y="4169664"/>
+            <a:ext cx="685800" cy="475488"/>
           </a:xfrm>
           <a:prstGeom prst="rect">
             <a:avLst>
-              <a:gd name="adj" fmla="val 9524"/>
+              <a:gd name="adj" fmla="val 7692"/>
             </a:avLst>
           </a:prstGeom>
           <a:solidFill>
@@ -28310,14 +28520,14 @@
       </p:sp>
       <p:sp>
         <p:nvSpPr>
-          <p:cNvPr id="49" name="Text 47"/>
-          <p:cNvSpPr/>
-          <p:nvPr/>
-        </p:nvSpPr>
-        <p:spPr>
-          <a:xfrm>
-            <a:off x="6668262" y="4169664"/>
-            <a:ext cx="685800" cy="384048"/>
+          <p:cNvPr id="51" name="Text 49"/>
+          <p:cNvSpPr/>
+          <p:nvPr/>
+        </p:nvSpPr>
+        <p:spPr>
+          <a:xfrm>
+            <a:off x="6062472" y="4169664"/>
+            <a:ext cx="685800" cy="475488"/>
           </a:xfrm>
           <a:prstGeom prst="rect">
             <a:avLst/>
@@ -28341,7 +28551,7 @@
                 <a:ea typeface="Trebuchet MS" pitchFamily="34" charset="-122"/>
                 <a:cs typeface="Trebuchet MS" pitchFamily="34" charset="-120"/>
               </a:rPr>
-              <a:t>io</a:t>
+              <a:t>o</a:t>
             </a:r>
             <a:endParaRPr lang="en-US" sz="900" dirty="0"/>
           </a:p>
@@ -28349,18 +28559,18 @@
       </p:sp>
       <p:sp>
         <p:nvSpPr>
-          <p:cNvPr id="50" name="Shape 48"/>
-          <p:cNvSpPr/>
-          <p:nvPr/>
-        </p:nvSpPr>
-        <p:spPr>
-          <a:xfrm>
-            <a:off x="7576947" y="4169664"/>
-            <a:ext cx="685800" cy="384048"/>
+          <p:cNvPr id="52" name="Shape 50"/>
+          <p:cNvSpPr/>
+          <p:nvPr/>
+        </p:nvSpPr>
+        <p:spPr>
+          <a:xfrm>
+            <a:off x="6870192" y="4169664"/>
+            <a:ext cx="685800" cy="475488"/>
           </a:xfrm>
           <a:prstGeom prst="rect">
             <a:avLst>
-              <a:gd name="adj" fmla="val 9524"/>
+              <a:gd name="adj" fmla="val 7692"/>
             </a:avLst>
           </a:prstGeom>
           <a:solidFill>
@@ -28376,14 +28586,14 @@
       </p:sp>
       <p:sp>
         <p:nvSpPr>
-          <p:cNvPr id="51" name="Text 49"/>
-          <p:cNvSpPr/>
-          <p:nvPr/>
-        </p:nvSpPr>
-        <p:spPr>
-          <a:xfrm>
-            <a:off x="7576947" y="4169664"/>
-            <a:ext cx="685800" cy="384048"/>
+          <p:cNvPr id="53" name="Text 51"/>
+          <p:cNvSpPr/>
+          <p:nvPr/>
+        </p:nvSpPr>
+        <p:spPr>
+          <a:xfrm>
+            <a:off x="6870192" y="4169664"/>
+            <a:ext cx="685800" cy="475488"/>
           </a:xfrm>
           <a:prstGeom prst="rect">
             <a:avLst/>
@@ -28407,7 +28617,73 @@
                 <a:ea typeface="Trebuchet MS" pitchFamily="34" charset="-122"/>
                 <a:cs typeface="Trebuchet MS" pitchFamily="34" charset="-120"/>
               </a:rPr>
-              <a:t>n</a:t>
+              <a:t>r</a:t>
+            </a:r>
+            <a:endParaRPr lang="en-US" sz="900" dirty="0"/>
+          </a:p>
+        </p:txBody>
+      </p:sp>
+      <p:sp>
+        <p:nvSpPr>
+          <p:cNvPr id="54" name="Shape 52"/>
+          <p:cNvSpPr/>
+          <p:nvPr/>
+        </p:nvSpPr>
+        <p:spPr>
+          <a:xfrm>
+            <a:off x="7677912" y="4169664"/>
+            <a:ext cx="685800" cy="475488"/>
+          </a:xfrm>
+          <a:prstGeom prst="rect">
+            <a:avLst>
+              <a:gd name="adj" fmla="val 7692"/>
+            </a:avLst>
+          </a:prstGeom>
+          <a:solidFill>
+            <a:srgbClr val="FFFFFF"/>
+          </a:solidFill>
+          <a:ln w="12700">
+            <a:solidFill>
+              <a:srgbClr val="DB2777"/>
+            </a:solidFill>
+            <a:prstDash val="solid"/>
+          </a:ln>
+        </p:spPr>
+      </p:sp>
+      <p:sp>
+        <p:nvSpPr>
+          <p:cNvPr id="55" name="Text 53"/>
+          <p:cNvSpPr/>
+          <p:nvPr/>
+        </p:nvSpPr>
+        <p:spPr>
+          <a:xfrm>
+            <a:off x="7677912" y="4169664"/>
+            <a:ext cx="685800" cy="475488"/>
+          </a:xfrm>
+          <a:prstGeom prst="rect">
+            <a:avLst/>
+          </a:prstGeom>
+          <a:noFill/>
+          <a:ln/>
+        </p:spPr>
+        <p:txBody>
+          <a:bodyPr wrap="square" lIns="0" tIns="0" rIns="0" bIns="0" rtlCol="0" anchor="ctr"/>
+          <a:lstStyle/>
+          <a:p>
+            <a:pPr algn="ctr" indent="0" marL="0">
+              <a:buNone/>
+            </a:pPr>
+            <a:r>
+              <a:rPr lang="en-US" sz="900" b="1" dirty="0">
+                <a:solidFill>
+                  <a:srgbClr val="9D174D"/>
+                </a:solidFill>
+                <a:latin typeface="Trebuchet MS" pitchFamily="34" charset="0"/>
+                <a:ea typeface="Trebuchet MS" pitchFamily="34" charset="-122"/>
+                <a:cs typeface="Trebuchet MS" pitchFamily="34" charset="-120"/>
+              </a:rPr>
+              <a:t>y</a:t>
             </a:r>
             <a:endParaRPr lang="en-US" sz="900" dirty="0"/>
           </a:p>
@@ -28838,7 +29114,7 @@
                 <a:ea typeface="Trebuchet MS" pitchFamily="34" charset="-122"/>
                 <a:cs typeface="Trebuchet MS" pitchFamily="34" charset="-120"/>
               </a:rPr>
-              <a:t>rotating</a:t>
+              <a:t>co-rotating</a:t>
             </a:r>
             <a:endParaRPr lang="en-US" sz="2800" dirty="0"/>
           </a:p>
@@ -29665,7 +29941,7 @@
                 <a:ea typeface="Trebuchet MS" pitchFamily="34" charset="-122"/>
                 <a:cs typeface="Trebuchet MS" pitchFamily="34" charset="-120"/>
               </a:rPr>
-              <a:t>rotating</a:t>
+              <a:t>co-rotating</a:t>
             </a:r>
             <a:endParaRPr lang="en-US" sz="2800" dirty="0"/>
           </a:p>
@@ -29745,7 +30021,7 @@
         </p:nvSpPr>
         <p:spPr>
           <a:xfrm>
-            <a:off x="2938272" y="2258568"/>
+            <a:off x="2221992" y="2258568"/>
             <a:ext cx="1828800" cy="292608"/>
           </a:xfrm>
           <a:prstGeom prst="rect">
@@ -29754,11 +30030,11 @@
             </a:avLst>
           </a:prstGeom>
           <a:solidFill>
-            <a:srgbClr val="CCFBF1"/>
+            <a:srgbClr val="DDD6FE"/>
           </a:solidFill>
           <a:ln w="19050">
             <a:solidFill>
-              <a:srgbClr val="0D9488"/>
+              <a:srgbClr val="7C3AED"/>
             </a:solidFill>
             <a:prstDash val="solid"/>
           </a:ln>
@@ -29779,7 +30055,7 @@
         </p:nvSpPr>
         <p:spPr>
           <a:xfrm>
-            <a:off x="2938272" y="2258568"/>
+            <a:off x="2221992" y="2258568"/>
             <a:ext cx="1828800" cy="292608"/>
           </a:xfrm>
           <a:prstGeom prst="rect">
@@ -29798,13 +30074,13 @@
             <a:r>
               <a:rPr lang="en-US" sz="1300" b="1" dirty="0">
                 <a:solidFill>
-                  <a:srgbClr val="0F766E"/>
+                  <a:srgbClr val="4C1D95"/>
                 </a:solidFill>
                 <a:latin typeface="Trebuchet MS" pitchFamily="34" charset="0"/>
                 <a:ea typeface="Trebuchet MS" pitchFamily="34" charset="-122"/>
                 <a:cs typeface="Trebuchet MS" pitchFamily="34" charset="-120"/>
               </a:rPr>
-              <a:t>rotate</a:t>
+              <a:t>co</a:t>
             </a:r>
             <a:endParaRPr lang="en-US" sz="1300" dirty="0"/>
           </a:p>
@@ -29818,7 +30094,7 @@
         </p:nvSpPr>
         <p:spPr>
           <a:xfrm>
-            <a:off x="2938272" y="2569464"/>
+            <a:off x="2221992" y="2569464"/>
             <a:ext cx="1828800" cy="201168"/>
           </a:xfrm>
           <a:prstGeom prst="rect">
@@ -29843,7 +30119,7 @@
                 <a:ea typeface="Calibri" pitchFamily="34" charset="-122"/>
                 <a:cs typeface="Calibri" pitchFamily="34" charset="-120"/>
               </a:rPr>
-              <a:t>to turn or spin</a:t>
+              <a:t>together or jointly</a:t>
             </a:r>
             <a:endParaRPr lang="en-US" sz="850" dirty="0"/>
           </a:p>
@@ -29851,52 +30127,13 @@
       </p:sp>
       <p:sp>
         <p:nvSpPr>
-          <p:cNvPr id="19" name="Text 17"/>
-          <p:cNvSpPr/>
-          <p:nvPr/>
-        </p:nvSpPr>
-        <p:spPr>
-          <a:xfrm>
-            <a:off x="2938272" y="2752344"/>
-            <a:ext cx="1828800" cy="182880"/>
-          </a:xfrm>
-          <a:prstGeom prst="rect">
-            <a:avLst/>
-          </a:prstGeom>
-          <a:noFill/>
-          <a:ln/>
-        </p:spPr>
-        <p:txBody>
-          <a:bodyPr wrap="square" lIns="0" tIns="0" rIns="0" bIns="0" rtlCol="0" anchor="t"/>
-          <a:lstStyle/>
-          <a:p>
-            <a:pPr algn="ctr" indent="0" marL="0">
-              <a:buNone/>
-            </a:pPr>
-            <a:r>
-              <a:rPr lang="en-US" sz="700" i="1" dirty="0">
-                <a:solidFill>
-                  <a:srgbClr val="94A3B8"/>
-                </a:solidFill>
-                <a:latin typeface="Calibri" pitchFamily="34" charset="0"/>
-                <a:ea typeface="Calibri" pitchFamily="34" charset="-122"/>
-                <a:cs typeface="Calibri" pitchFamily="34" charset="-120"/>
-              </a:rPr>
-              <a:t>'e' dropped before vowel suffix</a:t>
-            </a:r>
-            <a:endParaRPr lang="en-US" sz="700" dirty="0"/>
-          </a:p>
-        </p:txBody>
-      </p:sp>
-      <p:sp>
-        <p:nvSpPr>
-          <p:cNvPr id="20" name="Shape 18"/>
-          <p:cNvSpPr/>
-          <p:nvPr/>
-        </p:nvSpPr>
-        <p:spPr>
-          <a:xfrm>
-            <a:off x="5803392" y="2258568"/>
+          <p:cNvPr id="19" name="Shape 17"/>
+          <p:cNvSpPr/>
+          <p:nvPr/>
+        </p:nvSpPr>
+        <p:spPr>
+          <a:xfrm>
+            <a:off x="4370832" y="2258568"/>
             <a:ext cx="1828800" cy="292608"/>
           </a:xfrm>
           <a:prstGeom prst="rect">
@@ -29905,11 +30142,11 @@
             </a:avLst>
           </a:prstGeom>
           <a:solidFill>
-            <a:srgbClr val="FCE7F3"/>
+            <a:srgbClr val="CCFBF1"/>
           </a:solidFill>
           <a:ln w="19050">
             <a:solidFill>
-              <a:srgbClr val="DB2777"/>
+              <a:srgbClr val="0D9488"/>
             </a:solidFill>
             <a:prstDash val="solid"/>
           </a:ln>
@@ -29924,13 +30161,13 @@
       </p:sp>
       <p:sp>
         <p:nvSpPr>
-          <p:cNvPr id="21" name="Text 19"/>
-          <p:cNvSpPr/>
-          <p:nvPr/>
-        </p:nvSpPr>
-        <p:spPr>
-          <a:xfrm>
-            <a:off x="5803392" y="2258568"/>
+          <p:cNvPr id="20" name="Text 18"/>
+          <p:cNvSpPr/>
+          <p:nvPr/>
+        </p:nvSpPr>
+        <p:spPr>
+          <a:xfrm>
+            <a:off x="4370832" y="2258568"/>
             <a:ext cx="1828800" cy="292608"/>
           </a:xfrm>
           <a:prstGeom prst="rect">
@@ -29949,13 +30186,13 @@
             <a:r>
               <a:rPr lang="en-US" sz="1300" b="1" dirty="0">
                 <a:solidFill>
-                  <a:srgbClr val="9D174D"/>
+                  <a:srgbClr val="0F766E"/>
                 </a:solidFill>
                 <a:latin typeface="Trebuchet MS" pitchFamily="34" charset="0"/>
                 <a:ea typeface="Trebuchet MS" pitchFamily="34" charset="-122"/>
                 <a:cs typeface="Trebuchet MS" pitchFamily="34" charset="-120"/>
               </a:rPr>
-              <a:t>ing</a:t>
+              <a:t>rotate</a:t>
             </a:r>
             <a:endParaRPr lang="en-US" sz="1300" dirty="0"/>
           </a:p>
@@ -29963,13 +30200,13 @@
       </p:sp>
       <p:sp>
         <p:nvSpPr>
-          <p:cNvPr id="22" name="Text 20"/>
-          <p:cNvSpPr/>
-          <p:nvPr/>
-        </p:nvSpPr>
-        <p:spPr>
-          <a:xfrm>
-            <a:off x="5803392" y="2569464"/>
+          <p:cNvPr id="21" name="Text 19"/>
+          <p:cNvSpPr/>
+          <p:nvPr/>
+        </p:nvSpPr>
+        <p:spPr>
+          <a:xfrm>
+            <a:off x="4370832" y="2569464"/>
             <a:ext cx="1828800" cy="201168"/>
           </a:xfrm>
           <a:prstGeom prst="rect">
@@ -29994,6 +30231,157 @@
                 <a:ea typeface="Calibri" pitchFamily="34" charset="-122"/>
                 <a:cs typeface="Calibri" pitchFamily="34" charset="-120"/>
               </a:rPr>
+              <a:t>to turn or spin around</a:t>
+            </a:r>
+            <a:endParaRPr lang="en-US" sz="850" dirty="0"/>
+          </a:p>
+        </p:txBody>
+      </p:sp>
+      <p:sp>
+        <p:nvSpPr>
+          <p:cNvPr id="22" name="Text 20"/>
+          <p:cNvSpPr/>
+          <p:nvPr/>
+        </p:nvSpPr>
+        <p:spPr>
+          <a:xfrm>
+            <a:off x="4370832" y="2752344"/>
+            <a:ext cx="1828800" cy="182880"/>
+          </a:xfrm>
+          <a:prstGeom prst="rect">
+            <a:avLst/>
+          </a:prstGeom>
+          <a:noFill/>
+          <a:ln/>
+        </p:spPr>
+        <p:txBody>
+          <a:bodyPr wrap="square" lIns="0" tIns="0" rIns="0" bIns="0" rtlCol="0" anchor="t"/>
+          <a:lstStyle/>
+          <a:p>
+            <a:pPr algn="ctr" indent="0" marL="0">
+              <a:buNone/>
+            </a:pPr>
+            <a:r>
+              <a:rPr lang="en-US" sz="700" i="1" dirty="0">
+                <a:solidFill>
+                  <a:srgbClr val="94A3B8"/>
+                </a:solidFill>
+                <a:latin typeface="Calibri" pitchFamily="34" charset="0"/>
+                <a:ea typeface="Calibri" pitchFamily="34" charset="-122"/>
+                <a:cs typeface="Calibri" pitchFamily="34" charset="-120"/>
+              </a:rPr>
+              <a:t>'e' dropped before vowel suffix</a:t>
+            </a:r>
+            <a:endParaRPr lang="en-US" sz="700" dirty="0"/>
+          </a:p>
+        </p:txBody>
+      </p:sp>
+      <p:sp>
+        <p:nvSpPr>
+          <p:cNvPr id="23" name="Shape 21"/>
+          <p:cNvSpPr/>
+          <p:nvPr/>
+        </p:nvSpPr>
+        <p:spPr>
+          <a:xfrm>
+            <a:off x="6519672" y="2258568"/>
+            <a:ext cx="1828800" cy="292608"/>
+          </a:xfrm>
+          <a:prstGeom prst="rect">
+            <a:avLst>
+              <a:gd name="adj" fmla="val 25000"/>
+            </a:avLst>
+          </a:prstGeom>
+          <a:solidFill>
+            <a:srgbClr val="FCE7F3"/>
+          </a:solidFill>
+          <a:ln w="19050">
+            <a:solidFill>
+              <a:srgbClr val="DB2777"/>
+            </a:solidFill>
+            <a:prstDash val="solid"/>
+          </a:ln>
+          <a:effectLst>
+            <a:outerShdw sx="100000" sy="100000" kx="0" ky="0" algn="bl" rotWithShape="0" blurRad="101600" dist="38100" dir="8100000">
+              <a:srgbClr val="000000">
+                <a:alpha val="12000"/>
+              </a:srgbClr>
+            </a:outerShdw>
+          </a:effectLst>
+        </p:spPr>
+      </p:sp>
+      <p:sp>
+        <p:nvSpPr>
+          <p:cNvPr id="24" name="Text 22"/>
+          <p:cNvSpPr/>
+          <p:nvPr/>
+        </p:nvSpPr>
+        <p:spPr>
+          <a:xfrm>
+            <a:off x="6519672" y="2258568"/>
+            <a:ext cx="1828800" cy="292608"/>
+          </a:xfrm>
+          <a:prstGeom prst="rect">
+            <a:avLst/>
+          </a:prstGeom>
+          <a:noFill/>
+          <a:ln/>
+        </p:spPr>
+        <p:txBody>
+          <a:bodyPr wrap="square" lIns="0" tIns="0" rIns="0" bIns="0" rtlCol="0" anchor="ctr"/>
+          <a:lstStyle/>
+          <a:p>
+            <a:pPr algn="ctr" indent="0" marL="0">
+              <a:buNone/>
+            </a:pPr>
+            <a:r>
+              <a:rPr lang="en-US" sz="1300" b="1" dirty="0">
+                <a:solidFill>
+                  <a:srgbClr val="9D174D"/>
+                </a:solidFill>
+                <a:latin typeface="Trebuchet MS" pitchFamily="34" charset="0"/>
+                <a:ea typeface="Trebuchet MS" pitchFamily="34" charset="-122"/>
+                <a:cs typeface="Trebuchet MS" pitchFamily="34" charset="-120"/>
+              </a:rPr>
+              <a:t>ing</a:t>
+            </a:r>
+            <a:endParaRPr lang="en-US" sz="1300" dirty="0"/>
+          </a:p>
+        </p:txBody>
+      </p:sp>
+      <p:sp>
+        <p:nvSpPr>
+          <p:cNvPr id="25" name="Text 23"/>
+          <p:cNvSpPr/>
+          <p:nvPr/>
+        </p:nvSpPr>
+        <p:spPr>
+          <a:xfrm>
+            <a:off x="6519672" y="2569464"/>
+            <a:ext cx="1828800" cy="201168"/>
+          </a:xfrm>
+          <a:prstGeom prst="rect">
+            <a:avLst/>
+          </a:prstGeom>
+          <a:noFill/>
+          <a:ln/>
+        </p:spPr>
+        <p:txBody>
+          <a:bodyPr wrap="square" lIns="0" tIns="0" rIns="0" bIns="0" rtlCol="0" anchor="t"/>
+          <a:lstStyle/>
+          <a:p>
+            <a:pPr algn="ctr" indent="0" marL="0">
+              <a:buNone/>
+            </a:pPr>
+            <a:r>
+              <a:rPr lang="en-US" sz="850" dirty="0">
+                <a:solidFill>
+                  <a:srgbClr val="475569"/>
+                </a:solidFill>
+                <a:latin typeface="Calibri" pitchFamily="34" charset="0"/>
+                <a:ea typeface="Calibri" pitchFamily="34" charset="-122"/>
+                <a:cs typeface="Calibri" pitchFamily="34" charset="-120"/>
+              </a:rPr>
               <a:t>currently doing</a:t>
             </a:r>
             <a:endParaRPr lang="en-US" sz="850" dirty="0"/>
@@ -30002,7 +30390,7 @@
       </p:sp>
       <p:sp>
         <p:nvSpPr>
-          <p:cNvPr id="23" name="Shape 21"/>
+          <p:cNvPr id="26" name="Shape 24"/>
           <p:cNvSpPr/>
           <p:nvPr/>
         </p:nvSpPr>
@@ -30029,7 +30417,7 @@
       </p:sp>
       <p:sp>
         <p:nvSpPr>
-          <p:cNvPr id="24" name="Text 22"/>
+          <p:cNvPr id="27" name="Text 25"/>
           <p:cNvSpPr/>
           <p:nvPr/>
         </p:nvSpPr>
@@ -30068,7 +30456,7 @@
       </p:sp>
       <p:sp>
         <p:nvSpPr>
-          <p:cNvPr id="25" name="Shape 23"/>
+          <p:cNvPr id="28" name="Shape 26"/>
           <p:cNvSpPr/>
           <p:nvPr/>
         </p:nvSpPr>
@@ -30095,7 +30483,7 @@
       </p:sp>
       <p:sp>
         <p:nvSpPr>
-          <p:cNvPr id="26" name="Text 24"/>
+          <p:cNvPr id="29" name="Text 27"/>
           <p:cNvSpPr/>
           <p:nvPr/>
         </p:nvSpPr>
@@ -30134,7 +30522,7 @@
       </p:sp>
       <p:sp>
         <p:nvSpPr>
-          <p:cNvPr id="27" name="Shape 25"/>
+          <p:cNvPr id="30" name="Shape 28"/>
           <p:cNvSpPr/>
           <p:nvPr/>
         </p:nvSpPr>
@@ -30161,7 +30549,7 @@
       </p:sp>
       <p:sp>
         <p:nvSpPr>
-          <p:cNvPr id="28" name="Text 26"/>
+          <p:cNvPr id="31" name="Text 29"/>
           <p:cNvSpPr/>
           <p:nvPr/>
         </p:nvSpPr>
@@ -30200,7 +30588,7 @@
       </p:sp>
       <p:sp>
         <p:nvSpPr>
-          <p:cNvPr id="29" name="Shape 27"/>
+          <p:cNvPr id="32" name="Shape 30"/>
           <p:cNvSpPr/>
           <p:nvPr/>
         </p:nvSpPr>
@@ -30227,7 +30615,7 @@
       </p:sp>
       <p:sp>
         <p:nvSpPr>
-          <p:cNvPr id="30" name="Text 28"/>
+          <p:cNvPr id="33" name="Text 31"/>
           <p:cNvSpPr/>
           <p:nvPr/>
         </p:nvSpPr>
@@ -30689,7 +31077,7 @@
                 <a:ea typeface="Trebuchet MS" pitchFamily="34" charset="-122"/>
                 <a:cs typeface="Trebuchet MS" pitchFamily="34" charset="-120"/>
               </a:rPr>
-              <a:t>rotating</a:t>
+              <a:t>co-rotating</a:t>
             </a:r>
             <a:endParaRPr lang="en-US" sz="2800" dirty="0"/>
           </a:p>
@@ -30769,7 +31157,7 @@
         </p:nvSpPr>
         <p:spPr>
           <a:xfrm>
-            <a:off x="2938272" y="2258568"/>
+            <a:off x="2221992" y="2258568"/>
             <a:ext cx="1828800" cy="292608"/>
           </a:xfrm>
           <a:prstGeom prst="rect">
@@ -30778,11 +31166,11 @@
             </a:avLst>
           </a:prstGeom>
           <a:solidFill>
-            <a:srgbClr val="CCFBF1"/>
+            <a:srgbClr val="DDD6FE"/>
           </a:solidFill>
           <a:ln w="19050">
             <a:solidFill>
-              <a:srgbClr val="0D9488"/>
+              <a:srgbClr val="7C3AED"/>
             </a:solidFill>
             <a:prstDash val="solid"/>
           </a:ln>
@@ -30803,7 +31191,7 @@
         </p:nvSpPr>
         <p:spPr>
           <a:xfrm>
-            <a:off x="2938272" y="2258568"/>
+            <a:off x="2221992" y="2258568"/>
             <a:ext cx="1828800" cy="292608"/>
           </a:xfrm>
           <a:prstGeom prst="rect">
@@ -30822,13 +31210,13 @@
             <a:r>
               <a:rPr lang="en-US" sz="1300" b="1" dirty="0">
                 <a:solidFill>
-                  <a:srgbClr val="0F766E"/>
+                  <a:srgbClr val="4C1D95"/>
                 </a:solidFill>
                 <a:latin typeface="Trebuchet MS" pitchFamily="34" charset="0"/>
                 <a:ea typeface="Trebuchet MS" pitchFamily="34" charset="-122"/>
                 <a:cs typeface="Trebuchet MS" pitchFamily="34" charset="-120"/>
               </a:rPr>
-              <a:t>rotate</a:t>
+              <a:t>co</a:t>
             </a:r>
             <a:endParaRPr lang="en-US" sz="1300" dirty="0"/>
           </a:p>
@@ -30842,7 +31230,7 @@
         </p:nvSpPr>
         <p:spPr>
           <a:xfrm>
-            <a:off x="2938272" y="2569464"/>
+            <a:off x="2221992" y="2569464"/>
             <a:ext cx="1828800" cy="201168"/>
           </a:xfrm>
           <a:prstGeom prst="rect">
@@ -30867,7 +31255,7 @@
                 <a:ea typeface="Calibri" pitchFamily="34" charset="-122"/>
                 <a:cs typeface="Calibri" pitchFamily="34" charset="-120"/>
               </a:rPr>
-              <a:t>to turn or spin</a:t>
+              <a:t>together or jointly</a:t>
             </a:r>
             <a:endParaRPr lang="en-US" sz="850" dirty="0"/>
           </a:p>
@@ -30875,52 +31263,13 @@
       </p:sp>
       <p:sp>
         <p:nvSpPr>
-          <p:cNvPr id="19" name="Text 17"/>
-          <p:cNvSpPr/>
-          <p:nvPr/>
-        </p:nvSpPr>
-        <p:spPr>
-          <a:xfrm>
-            <a:off x="2938272" y="2752344"/>
-            <a:ext cx="1828800" cy="182880"/>
-          </a:xfrm>
-          <a:prstGeom prst="rect">
-            <a:avLst/>
-          </a:prstGeom>
-          <a:noFill/>
-          <a:ln/>
-        </p:spPr>
-        <p:txBody>
-          <a:bodyPr wrap="square" lIns="0" tIns="0" rIns="0" bIns="0" rtlCol="0" anchor="t"/>
-          <a:lstStyle/>
-          <a:p>
-            <a:pPr algn="ctr" indent="0" marL="0">
-              <a:buNone/>
-            </a:pPr>
-            <a:r>
-              <a:rPr lang="en-US" sz="700" i="1" dirty="0">
-                <a:solidFill>
-                  <a:srgbClr val="94A3B8"/>
-                </a:solidFill>
-                <a:latin typeface="Calibri" pitchFamily="34" charset="0"/>
-                <a:ea typeface="Calibri" pitchFamily="34" charset="-122"/>
-                <a:cs typeface="Calibri" pitchFamily="34" charset="-120"/>
-              </a:rPr>
-              <a:t>'e' dropped before vowel suffix</a:t>
-            </a:r>
-            <a:endParaRPr lang="en-US" sz="700" dirty="0"/>
-          </a:p>
-        </p:txBody>
-      </p:sp>
-      <p:sp>
-        <p:nvSpPr>
-          <p:cNvPr id="20" name="Shape 18"/>
-          <p:cNvSpPr/>
-          <p:nvPr/>
-        </p:nvSpPr>
-        <p:spPr>
-          <a:xfrm>
-            <a:off x="5803392" y="2258568"/>
+          <p:cNvPr id="19" name="Shape 17"/>
+          <p:cNvSpPr/>
+          <p:nvPr/>
+        </p:nvSpPr>
+        <p:spPr>
+          <a:xfrm>
+            <a:off x="4370832" y="2258568"/>
             <a:ext cx="1828800" cy="292608"/>
           </a:xfrm>
           <a:prstGeom prst="rect">
@@ -30929,11 +31278,11 @@
             </a:avLst>
           </a:prstGeom>
           <a:solidFill>
-            <a:srgbClr val="FCE7F3"/>
+            <a:srgbClr val="CCFBF1"/>
           </a:solidFill>
           <a:ln w="19050">
             <a:solidFill>
-              <a:srgbClr val="DB2777"/>
+              <a:srgbClr val="0D9488"/>
             </a:solidFill>
             <a:prstDash val="solid"/>
           </a:ln>
@@ -30948,13 +31297,13 @@
       </p:sp>
       <p:sp>
         <p:nvSpPr>
-          <p:cNvPr id="21" name="Text 19"/>
-          <p:cNvSpPr/>
-          <p:nvPr/>
-        </p:nvSpPr>
-        <p:spPr>
-          <a:xfrm>
-            <a:off x="5803392" y="2258568"/>
+          <p:cNvPr id="20" name="Text 18"/>
+          <p:cNvSpPr/>
+          <p:nvPr/>
+        </p:nvSpPr>
+        <p:spPr>
+          <a:xfrm>
+            <a:off x="4370832" y="2258568"/>
             <a:ext cx="1828800" cy="292608"/>
           </a:xfrm>
           <a:prstGeom prst="rect">
@@ -30973,13 +31322,13 @@
             <a:r>
               <a:rPr lang="en-US" sz="1300" b="1" dirty="0">
                 <a:solidFill>
-                  <a:srgbClr val="9D174D"/>
+                  <a:srgbClr val="0F766E"/>
                 </a:solidFill>
                 <a:latin typeface="Trebuchet MS" pitchFamily="34" charset="0"/>
                 <a:ea typeface="Trebuchet MS" pitchFamily="34" charset="-122"/>
                 <a:cs typeface="Trebuchet MS" pitchFamily="34" charset="-120"/>
               </a:rPr>
-              <a:t>ing</a:t>
+              <a:t>rotate</a:t>
             </a:r>
             <a:endParaRPr lang="en-US" sz="1300" dirty="0"/>
           </a:p>
@@ -30987,13 +31336,13 @@
       </p:sp>
       <p:sp>
         <p:nvSpPr>
-          <p:cNvPr id="22" name="Text 20"/>
-          <p:cNvSpPr/>
-          <p:nvPr/>
-        </p:nvSpPr>
-        <p:spPr>
-          <a:xfrm>
-            <a:off x="5803392" y="2569464"/>
+          <p:cNvPr id="21" name="Text 19"/>
+          <p:cNvSpPr/>
+          <p:nvPr/>
+        </p:nvSpPr>
+        <p:spPr>
+          <a:xfrm>
+            <a:off x="4370832" y="2569464"/>
             <a:ext cx="1828800" cy="201168"/>
           </a:xfrm>
           <a:prstGeom prst="rect">
@@ -31018,6 +31367,157 @@
                 <a:ea typeface="Calibri" pitchFamily="34" charset="-122"/>
                 <a:cs typeface="Calibri" pitchFamily="34" charset="-120"/>
               </a:rPr>
+              <a:t>to turn or spin around</a:t>
+            </a:r>
+            <a:endParaRPr lang="en-US" sz="850" dirty="0"/>
+          </a:p>
+        </p:txBody>
+      </p:sp>
+      <p:sp>
+        <p:nvSpPr>
+          <p:cNvPr id="22" name="Text 20"/>
+          <p:cNvSpPr/>
+          <p:nvPr/>
+        </p:nvSpPr>
+        <p:spPr>
+          <a:xfrm>
+            <a:off x="4370832" y="2752344"/>
+            <a:ext cx="1828800" cy="182880"/>
+          </a:xfrm>
+          <a:prstGeom prst="rect">
+            <a:avLst/>
+          </a:prstGeom>
+          <a:noFill/>
+          <a:ln/>
+        </p:spPr>
+        <p:txBody>
+          <a:bodyPr wrap="square" lIns="0" tIns="0" rIns="0" bIns="0" rtlCol="0" anchor="t"/>
+          <a:lstStyle/>
+          <a:p>
+            <a:pPr algn="ctr" indent="0" marL="0">
+              <a:buNone/>
+            </a:pPr>
+            <a:r>
+              <a:rPr lang="en-US" sz="700" i="1" dirty="0">
+                <a:solidFill>
+                  <a:srgbClr val="94A3B8"/>
+                </a:solidFill>
+                <a:latin typeface="Calibri" pitchFamily="34" charset="0"/>
+                <a:ea typeface="Calibri" pitchFamily="34" charset="-122"/>
+                <a:cs typeface="Calibri" pitchFamily="34" charset="-120"/>
+              </a:rPr>
+              <a:t>'e' dropped before vowel suffix</a:t>
+            </a:r>
+            <a:endParaRPr lang="en-US" sz="700" dirty="0"/>
+          </a:p>
+        </p:txBody>
+      </p:sp>
+      <p:sp>
+        <p:nvSpPr>
+          <p:cNvPr id="23" name="Shape 21"/>
+          <p:cNvSpPr/>
+          <p:nvPr/>
+        </p:nvSpPr>
+        <p:spPr>
+          <a:xfrm>
+            <a:off x="6519672" y="2258568"/>
+            <a:ext cx="1828800" cy="292608"/>
+          </a:xfrm>
+          <a:prstGeom prst="rect">
+            <a:avLst>
+              <a:gd name="adj" fmla="val 25000"/>
+            </a:avLst>
+          </a:prstGeom>
+          <a:solidFill>
+            <a:srgbClr val="FCE7F3"/>
+          </a:solidFill>
+          <a:ln w="19050">
+            <a:solidFill>
+              <a:srgbClr val="DB2777"/>
+            </a:solidFill>
+            <a:prstDash val="solid"/>
+          </a:ln>
+          <a:effectLst>
+            <a:outerShdw sx="100000" sy="100000" kx="0" ky="0" algn="bl" rotWithShape="0" blurRad="101600" dist="38100" dir="8100000">
+              <a:srgbClr val="000000">
+                <a:alpha val="12000"/>
+              </a:srgbClr>
+            </a:outerShdw>
+          </a:effectLst>
+        </p:spPr>
+      </p:sp>
+      <p:sp>
+        <p:nvSpPr>
+          <p:cNvPr id="24" name="Text 22"/>
+          <p:cNvSpPr/>
+          <p:nvPr/>
+        </p:nvSpPr>
+        <p:spPr>
+          <a:xfrm>
+            <a:off x="6519672" y="2258568"/>
+            <a:ext cx="1828800" cy="292608"/>
+          </a:xfrm>
+          <a:prstGeom prst="rect">
+            <a:avLst/>
+          </a:prstGeom>
+          <a:noFill/>
+          <a:ln/>
+        </p:spPr>
+        <p:txBody>
+          <a:bodyPr wrap="square" lIns="0" tIns="0" rIns="0" bIns="0" rtlCol="0" anchor="ctr"/>
+          <a:lstStyle/>
+          <a:p>
+            <a:pPr algn="ctr" indent="0" marL="0">
+              <a:buNone/>
+            </a:pPr>
+            <a:r>
+              <a:rPr lang="en-US" sz="1300" b="1" dirty="0">
+                <a:solidFill>
+                  <a:srgbClr val="9D174D"/>
+                </a:solidFill>
+                <a:latin typeface="Trebuchet MS" pitchFamily="34" charset="0"/>
+                <a:ea typeface="Trebuchet MS" pitchFamily="34" charset="-122"/>
+                <a:cs typeface="Trebuchet MS" pitchFamily="34" charset="-120"/>
+              </a:rPr>
+              <a:t>ing</a:t>
+            </a:r>
+            <a:endParaRPr lang="en-US" sz="1300" dirty="0"/>
+          </a:p>
+        </p:txBody>
+      </p:sp>
+      <p:sp>
+        <p:nvSpPr>
+          <p:cNvPr id="25" name="Text 23"/>
+          <p:cNvSpPr/>
+          <p:nvPr/>
+        </p:nvSpPr>
+        <p:spPr>
+          <a:xfrm>
+            <a:off x="6519672" y="2569464"/>
+            <a:ext cx="1828800" cy="201168"/>
+          </a:xfrm>
+          <a:prstGeom prst="rect">
+            <a:avLst/>
+          </a:prstGeom>
+          <a:noFill/>
+          <a:ln/>
+        </p:spPr>
+        <p:txBody>
+          <a:bodyPr wrap="square" lIns="0" tIns="0" rIns="0" bIns="0" rtlCol="0" anchor="t"/>
+          <a:lstStyle/>
+          <a:p>
+            <a:pPr algn="ctr" indent="0" marL="0">
+              <a:buNone/>
+            </a:pPr>
+            <a:r>
+              <a:rPr lang="en-US" sz="850" dirty="0">
+                <a:solidFill>
+                  <a:srgbClr val="475569"/>
+                </a:solidFill>
+                <a:latin typeface="Calibri" pitchFamily="34" charset="0"/>
+                <a:ea typeface="Calibri" pitchFamily="34" charset="-122"/>
+                <a:cs typeface="Calibri" pitchFamily="34" charset="-120"/>
+              </a:rPr>
               <a:t>currently doing</a:t>
             </a:r>
             <a:endParaRPr lang="en-US" sz="850" dirty="0"/>
@@ -31026,7 +31526,7 @@
       </p:sp>
       <p:sp>
         <p:nvSpPr>
-          <p:cNvPr id="23" name="Shape 21"/>
+          <p:cNvPr id="26" name="Shape 24"/>
           <p:cNvSpPr/>
           <p:nvPr/>
         </p:nvSpPr>
@@ -31053,7 +31553,7 @@
       </p:sp>
       <p:sp>
         <p:nvSpPr>
-          <p:cNvPr id="24" name="Text 22"/>
+          <p:cNvPr id="27" name="Text 25"/>
           <p:cNvSpPr/>
           <p:nvPr/>
         </p:nvSpPr>
@@ -31092,7 +31592,7 @@
       </p:sp>
       <p:sp>
         <p:nvSpPr>
-          <p:cNvPr id="25" name="Shape 23"/>
+          <p:cNvPr id="28" name="Shape 26"/>
           <p:cNvSpPr/>
           <p:nvPr/>
         </p:nvSpPr>
@@ -31119,7 +31619,7 @@
       </p:sp>
       <p:sp>
         <p:nvSpPr>
-          <p:cNvPr id="26" name="Shape 24"/>
+          <p:cNvPr id="29" name="Shape 27"/>
           <p:cNvSpPr/>
           <p:nvPr/>
         </p:nvSpPr>
@@ -31146,7 +31646,7 @@
       </p:sp>
       <p:sp>
         <p:nvSpPr>
-          <p:cNvPr id="27" name="Text 25"/>
+          <p:cNvPr id="30" name="Text 28"/>
           <p:cNvSpPr/>
           <p:nvPr/>
         </p:nvSpPr>
@@ -31177,7 +31677,7 @@
                 <a:ea typeface="Trebuchet MS" pitchFamily="34" charset="-122"/>
                 <a:cs typeface="Trebuchet MS" pitchFamily="34" charset="-120"/>
               </a:rPr>
-              <a:t>ro</a:t>
+              <a:t>co-ro</a:t>
             </a:r>
             <a:endParaRPr lang="en-US" sz="1400" dirty="0"/>
           </a:p>
@@ -31185,7 +31685,7 @@
       </p:sp>
       <p:sp>
         <p:nvSpPr>
-          <p:cNvPr id="28" name="Text 26"/>
+          <p:cNvPr id="31" name="Text 29"/>
           <p:cNvSpPr/>
           <p:nvPr/>
         </p:nvSpPr>
@@ -31224,7 +31724,7 @@
       </p:sp>
       <p:sp>
         <p:nvSpPr>
-          <p:cNvPr id="29" name="Shape 27"/>
+          <p:cNvPr id="32" name="Shape 30"/>
           <p:cNvSpPr/>
           <p:nvPr/>
         </p:nvSpPr>
@@ -31251,7 +31751,7 @@
       </p:sp>
       <p:sp>
         <p:nvSpPr>
-          <p:cNvPr id="30" name="Text 28"/>
+          <p:cNvPr id="33" name="Text 31"/>
           <p:cNvSpPr/>
           <p:nvPr/>
         </p:nvSpPr>
@@ -31282,7 +31782,7 @@
                 <a:ea typeface="Trebuchet MS" pitchFamily="34" charset="-122"/>
                 <a:cs typeface="Trebuchet MS" pitchFamily="34" charset="-120"/>
               </a:rPr>
-              <a:t>tat</a:t>
+              <a:t>ta</a:t>
             </a:r>
             <a:endParaRPr lang="en-US" sz="1400" dirty="0"/>
           </a:p>
@@ -31290,7 +31790,7 @@
       </p:sp>
       <p:sp>
         <p:nvSpPr>
-          <p:cNvPr id="31" name="Text 29"/>
+          <p:cNvPr id="34" name="Text 32"/>
           <p:cNvSpPr/>
           <p:nvPr/>
         </p:nvSpPr>
@@ -31329,7 +31829,7 @@
       </p:sp>
       <p:sp>
         <p:nvSpPr>
-          <p:cNvPr id="32" name="Shape 30"/>
+          <p:cNvPr id="35" name="Shape 33"/>
           <p:cNvSpPr/>
           <p:nvPr/>
         </p:nvSpPr>
@@ -31356,7 +31856,7 @@
       </p:sp>
       <p:sp>
         <p:nvSpPr>
-          <p:cNvPr id="33" name="Text 31"/>
+          <p:cNvPr id="36" name="Text 34"/>
           <p:cNvSpPr/>
           <p:nvPr/>
         </p:nvSpPr>
@@ -31387,7 +31887,7 @@
                 <a:ea typeface="Trebuchet MS" pitchFamily="34" charset="-122"/>
                 <a:cs typeface="Trebuchet MS" pitchFamily="34" charset="-120"/>
               </a:rPr>
-              <a:t>ing</a:t>
+              <a:t>ting</a:t>
             </a:r>
             <a:endParaRPr lang="en-US" sz="1400" dirty="0"/>
           </a:p>
@@ -31395,7 +31895,7 @@
       </p:sp>
       <p:sp>
         <p:nvSpPr>
-          <p:cNvPr id="34" name="Shape 32"/>
+          <p:cNvPr id="37" name="Shape 35"/>
           <p:cNvSpPr/>
           <p:nvPr/>
         </p:nvSpPr>
@@ -31422,7 +31922,7 @@
       </p:sp>
       <p:sp>
         <p:nvSpPr>
-          <p:cNvPr id="35" name="Text 33"/>
+          <p:cNvPr id="38" name="Text 36"/>
           <p:cNvSpPr/>
           <p:nvPr/>
         </p:nvSpPr>
@@ -31461,7 +31961,7 @@
       </p:sp>
       <p:sp>
         <p:nvSpPr>
-          <p:cNvPr id="36" name="Shape 34"/>
+          <p:cNvPr id="39" name="Shape 37"/>
           <p:cNvSpPr/>
           <p:nvPr/>
         </p:nvSpPr>
@@ -31488,7 +31988,7 @@
       </p:sp>
       <p:sp>
         <p:nvSpPr>
-          <p:cNvPr id="37" name="Text 35"/>
+          <p:cNvPr id="40" name="Text 38"/>
           <p:cNvSpPr/>
           <p:nvPr/>
         </p:nvSpPr>
@@ -31950,7 +32450,7 @@
                 <a:ea typeface="Trebuchet MS" pitchFamily="34" charset="-122"/>
                 <a:cs typeface="Trebuchet MS" pitchFamily="34" charset="-120"/>
               </a:rPr>
-              <a:t>rotating</a:t>
+              <a:t>co-rotating</a:t>
             </a:r>
             <a:endParaRPr lang="en-US" sz="2800" dirty="0"/>
           </a:p>
@@ -32030,7 +32530,7 @@
         </p:nvSpPr>
         <p:spPr>
           <a:xfrm>
-            <a:off x="2938272" y="2258568"/>
+            <a:off x="2221992" y="2258568"/>
             <a:ext cx="1828800" cy="292608"/>
           </a:xfrm>
           <a:prstGeom prst="rect">
@@ -32039,11 +32539,11 @@
             </a:avLst>
           </a:prstGeom>
           <a:solidFill>
-            <a:srgbClr val="CCFBF1"/>
+            <a:srgbClr val="DDD6FE"/>
           </a:solidFill>
           <a:ln w="19050">
             <a:solidFill>
-              <a:srgbClr val="0D9488"/>
+              <a:srgbClr val="7C3AED"/>
             </a:solidFill>
             <a:prstDash val="solid"/>
           </a:ln>
@@ -32064,7 +32564,7 @@
         </p:nvSpPr>
         <p:spPr>
           <a:xfrm>
-            <a:off x="2938272" y="2258568"/>
+            <a:off x="2221992" y="2258568"/>
             <a:ext cx="1828800" cy="292608"/>
           </a:xfrm>
           <a:prstGeom prst="rect">
@@ -32083,13 +32583,13 @@
             <a:r>
               <a:rPr lang="en-US" sz="1300" b="1" dirty="0">
                 <a:solidFill>
-                  <a:srgbClr val="0F766E"/>
+                  <a:srgbClr val="4C1D95"/>
                 </a:solidFill>
                 <a:latin typeface="Trebuchet MS" pitchFamily="34" charset="0"/>
                 <a:ea typeface="Trebuchet MS" pitchFamily="34" charset="-122"/>
                 <a:cs typeface="Trebuchet MS" pitchFamily="34" charset="-120"/>
               </a:rPr>
-              <a:t>rotate</a:t>
+              <a:t>co</a:t>
             </a:r>
             <a:endParaRPr lang="en-US" sz="1300" dirty="0"/>
           </a:p>
@@ -32103,7 +32603,7 @@
         </p:nvSpPr>
         <p:spPr>
           <a:xfrm>
-            <a:off x="2938272" y="2569464"/>
+            <a:off x="2221992" y="2569464"/>
             <a:ext cx="1828800" cy="201168"/>
           </a:xfrm>
           <a:prstGeom prst="rect">
@@ -32128,7 +32628,7 @@
                 <a:ea typeface="Calibri" pitchFamily="34" charset="-122"/>
                 <a:cs typeface="Calibri" pitchFamily="34" charset="-120"/>
               </a:rPr>
-              <a:t>to turn or spin</a:t>
+              <a:t>together or jointly</a:t>
             </a:r>
             <a:endParaRPr lang="en-US" sz="850" dirty="0"/>
           </a:p>
@@ -32136,52 +32636,13 @@
       </p:sp>
       <p:sp>
         <p:nvSpPr>
-          <p:cNvPr id="19" name="Text 17"/>
-          <p:cNvSpPr/>
-          <p:nvPr/>
-        </p:nvSpPr>
-        <p:spPr>
-          <a:xfrm>
-            <a:off x="2938272" y="2752344"/>
-            <a:ext cx="1828800" cy="182880"/>
-          </a:xfrm>
-          <a:prstGeom prst="rect">
-            <a:avLst/>
-          </a:prstGeom>
-          <a:noFill/>
-          <a:ln/>
-        </p:spPr>
-        <p:txBody>
-          <a:bodyPr wrap="square" lIns="0" tIns="0" rIns="0" bIns="0" rtlCol="0" anchor="t"/>
-          <a:lstStyle/>
-          <a:p>
-            <a:pPr algn="ctr" indent="0" marL="0">
-              <a:buNone/>
-            </a:pPr>
-            <a:r>
-              <a:rPr lang="en-US" sz="700" i="1" dirty="0">
-                <a:solidFill>
-                  <a:srgbClr val="94A3B8"/>
-                </a:solidFill>
-                <a:latin typeface="Calibri" pitchFamily="34" charset="0"/>
-                <a:ea typeface="Calibri" pitchFamily="34" charset="-122"/>
-                <a:cs typeface="Calibri" pitchFamily="34" charset="-120"/>
-              </a:rPr>
-              <a:t>'e' dropped before vowel suffix</a:t>
-            </a:r>
-            <a:endParaRPr lang="en-US" sz="700" dirty="0"/>
-          </a:p>
-        </p:txBody>
-      </p:sp>
-      <p:sp>
-        <p:nvSpPr>
-          <p:cNvPr id="20" name="Shape 18"/>
-          <p:cNvSpPr/>
-          <p:nvPr/>
-        </p:nvSpPr>
-        <p:spPr>
-          <a:xfrm>
-            <a:off x="5803392" y="2258568"/>
+          <p:cNvPr id="19" name="Shape 17"/>
+          <p:cNvSpPr/>
+          <p:nvPr/>
+        </p:nvSpPr>
+        <p:spPr>
+          <a:xfrm>
+            <a:off x="4370832" y="2258568"/>
             <a:ext cx="1828800" cy="292608"/>
           </a:xfrm>
           <a:prstGeom prst="rect">
@@ -32190,11 +32651,11 @@
             </a:avLst>
           </a:prstGeom>
           <a:solidFill>
-            <a:srgbClr val="FCE7F3"/>
+            <a:srgbClr val="CCFBF1"/>
           </a:solidFill>
           <a:ln w="19050">
             <a:solidFill>
-              <a:srgbClr val="DB2777"/>
+              <a:srgbClr val="0D9488"/>
             </a:solidFill>
             <a:prstDash val="solid"/>
           </a:ln>
@@ -32209,13 +32670,13 @@
       </p:sp>
       <p:sp>
         <p:nvSpPr>
-          <p:cNvPr id="21" name="Text 19"/>
-          <p:cNvSpPr/>
-          <p:nvPr/>
-        </p:nvSpPr>
-        <p:spPr>
-          <a:xfrm>
-            <a:off x="5803392" y="2258568"/>
+          <p:cNvPr id="20" name="Text 18"/>
+          <p:cNvSpPr/>
+          <p:nvPr/>
+        </p:nvSpPr>
+        <p:spPr>
+          <a:xfrm>
+            <a:off x="4370832" y="2258568"/>
             <a:ext cx="1828800" cy="292608"/>
           </a:xfrm>
           <a:prstGeom prst="rect">
@@ -32234,13 +32695,13 @@
             <a:r>
               <a:rPr lang="en-US" sz="1300" b="1" dirty="0">
                 <a:solidFill>
-                  <a:srgbClr val="9D174D"/>
+                  <a:srgbClr val="0F766E"/>
                 </a:solidFill>
                 <a:latin typeface="Trebuchet MS" pitchFamily="34" charset="0"/>
                 <a:ea typeface="Trebuchet MS" pitchFamily="34" charset="-122"/>
                 <a:cs typeface="Trebuchet MS" pitchFamily="34" charset="-120"/>
               </a:rPr>
-              <a:t>ing</a:t>
+              <a:t>rotate</a:t>
             </a:r>
             <a:endParaRPr lang="en-US" sz="1300" dirty="0"/>
           </a:p>
@@ -32248,13 +32709,13 @@
       </p:sp>
       <p:sp>
         <p:nvSpPr>
-          <p:cNvPr id="22" name="Text 20"/>
-          <p:cNvSpPr/>
-          <p:nvPr/>
-        </p:nvSpPr>
-        <p:spPr>
-          <a:xfrm>
-            <a:off x="5803392" y="2569464"/>
+          <p:cNvPr id="21" name="Text 19"/>
+          <p:cNvSpPr/>
+          <p:nvPr/>
+        </p:nvSpPr>
+        <p:spPr>
+          <a:xfrm>
+            <a:off x="4370832" y="2569464"/>
             <a:ext cx="1828800" cy="201168"/>
           </a:xfrm>
           <a:prstGeom prst="rect">
@@ -32279,6 +32740,157 @@
                 <a:ea typeface="Calibri" pitchFamily="34" charset="-122"/>
                 <a:cs typeface="Calibri" pitchFamily="34" charset="-120"/>
               </a:rPr>
+              <a:t>to turn or spin around</a:t>
+            </a:r>
+            <a:endParaRPr lang="en-US" sz="850" dirty="0"/>
+          </a:p>
+        </p:txBody>
+      </p:sp>
+      <p:sp>
+        <p:nvSpPr>
+          <p:cNvPr id="22" name="Text 20"/>
+          <p:cNvSpPr/>
+          <p:nvPr/>
+        </p:nvSpPr>
+        <p:spPr>
+          <a:xfrm>
+            <a:off x="4370832" y="2752344"/>
+            <a:ext cx="1828800" cy="182880"/>
+          </a:xfrm>
+          <a:prstGeom prst="rect">
+            <a:avLst/>
+          </a:prstGeom>
+          <a:noFill/>
+          <a:ln/>
+        </p:spPr>
+        <p:txBody>
+          <a:bodyPr wrap="square" lIns="0" tIns="0" rIns="0" bIns="0" rtlCol="0" anchor="t"/>
+          <a:lstStyle/>
+          <a:p>
+            <a:pPr algn="ctr" indent="0" marL="0">
+              <a:buNone/>
+            </a:pPr>
+            <a:r>
+              <a:rPr lang="en-US" sz="700" i="1" dirty="0">
+                <a:solidFill>
+                  <a:srgbClr val="94A3B8"/>
+                </a:solidFill>
+                <a:latin typeface="Calibri" pitchFamily="34" charset="0"/>
+                <a:ea typeface="Calibri" pitchFamily="34" charset="-122"/>
+                <a:cs typeface="Calibri" pitchFamily="34" charset="-120"/>
+              </a:rPr>
+              <a:t>'e' dropped before vowel suffix</a:t>
+            </a:r>
+            <a:endParaRPr lang="en-US" sz="700" dirty="0"/>
+          </a:p>
+        </p:txBody>
+      </p:sp>
+      <p:sp>
+        <p:nvSpPr>
+          <p:cNvPr id="23" name="Shape 21"/>
+          <p:cNvSpPr/>
+          <p:nvPr/>
+        </p:nvSpPr>
+        <p:spPr>
+          <a:xfrm>
+            <a:off x="6519672" y="2258568"/>
+            <a:ext cx="1828800" cy="292608"/>
+          </a:xfrm>
+          <a:prstGeom prst="rect">
+            <a:avLst>
+              <a:gd name="adj" fmla="val 25000"/>
+            </a:avLst>
+          </a:prstGeom>
+          <a:solidFill>
+            <a:srgbClr val="FCE7F3"/>
+          </a:solidFill>
+          <a:ln w="19050">
+            <a:solidFill>
+              <a:srgbClr val="DB2777"/>
+            </a:solidFill>
+            <a:prstDash val="solid"/>
+          </a:ln>
+          <a:effectLst>
+            <a:outerShdw sx="100000" sy="100000" kx="0" ky="0" algn="bl" rotWithShape="0" blurRad="101600" dist="38100" dir="8100000">
+              <a:srgbClr val="000000">
+                <a:alpha val="12000"/>
+              </a:srgbClr>
+            </a:outerShdw>
+          </a:effectLst>
+        </p:spPr>
+      </p:sp>
+      <p:sp>
+        <p:nvSpPr>
+          <p:cNvPr id="24" name="Text 22"/>
+          <p:cNvSpPr/>
+          <p:nvPr/>
+        </p:nvSpPr>
+        <p:spPr>
+          <a:xfrm>
+            <a:off x="6519672" y="2258568"/>
+            <a:ext cx="1828800" cy="292608"/>
+          </a:xfrm>
+          <a:prstGeom prst="rect">
+            <a:avLst/>
+          </a:prstGeom>
+          <a:noFill/>
+          <a:ln/>
+        </p:spPr>
+        <p:txBody>
+          <a:bodyPr wrap="square" lIns="0" tIns="0" rIns="0" bIns="0" rtlCol="0" anchor="ctr"/>
+          <a:lstStyle/>
+          <a:p>
+            <a:pPr algn="ctr" indent="0" marL="0">
+              <a:buNone/>
+            </a:pPr>
+            <a:r>
+              <a:rPr lang="en-US" sz="1300" b="1" dirty="0">
+                <a:solidFill>
+                  <a:srgbClr val="9D174D"/>
+                </a:solidFill>
+                <a:latin typeface="Trebuchet MS" pitchFamily="34" charset="0"/>
+                <a:ea typeface="Trebuchet MS" pitchFamily="34" charset="-122"/>
+                <a:cs typeface="Trebuchet MS" pitchFamily="34" charset="-120"/>
+              </a:rPr>
+              <a:t>ing</a:t>
+            </a:r>
+            <a:endParaRPr lang="en-US" sz="1300" dirty="0"/>
+          </a:p>
+        </p:txBody>
+      </p:sp>
+      <p:sp>
+        <p:nvSpPr>
+          <p:cNvPr id="25" name="Text 23"/>
+          <p:cNvSpPr/>
+          <p:nvPr/>
+        </p:nvSpPr>
+        <p:spPr>
+          <a:xfrm>
+            <a:off x="6519672" y="2569464"/>
+            <a:ext cx="1828800" cy="201168"/>
+          </a:xfrm>
+          <a:prstGeom prst="rect">
+            <a:avLst/>
+          </a:prstGeom>
+          <a:noFill/>
+          <a:ln/>
+        </p:spPr>
+        <p:txBody>
+          <a:bodyPr wrap="square" lIns="0" tIns="0" rIns="0" bIns="0" rtlCol="0" anchor="t"/>
+          <a:lstStyle/>
+          <a:p>
+            <a:pPr algn="ctr" indent="0" marL="0">
+              <a:buNone/>
+            </a:pPr>
+            <a:r>
+              <a:rPr lang="en-US" sz="850" dirty="0">
+                <a:solidFill>
+                  <a:srgbClr val="475569"/>
+                </a:solidFill>
+                <a:latin typeface="Calibri" pitchFamily="34" charset="0"/>
+                <a:ea typeface="Calibri" pitchFamily="34" charset="-122"/>
+                <a:cs typeface="Calibri" pitchFamily="34" charset="-120"/>
+              </a:rPr>
               <a:t>currently doing</a:t>
             </a:r>
             <a:endParaRPr lang="en-US" sz="850" dirty="0"/>
@@ -32287,7 +32899,7 @@
       </p:sp>
       <p:sp>
         <p:nvSpPr>
-          <p:cNvPr id="23" name="Shape 21"/>
+          <p:cNvPr id="26" name="Shape 24"/>
           <p:cNvSpPr/>
           <p:nvPr/>
         </p:nvSpPr>
@@ -32314,7 +32926,7 @@
       </p:sp>
       <p:sp>
         <p:nvSpPr>
-          <p:cNvPr id="24" name="Text 22"/>
+          <p:cNvPr id="27" name="Text 25"/>
           <p:cNvSpPr/>
           <p:nvPr/>
         </p:nvSpPr>
@@ -32353,7 +32965,7 @@
       </p:sp>
       <p:sp>
         <p:nvSpPr>
-          <p:cNvPr id="25" name="Shape 23"/>
+          <p:cNvPr id="28" name="Shape 26"/>
           <p:cNvSpPr/>
           <p:nvPr/>
         </p:nvSpPr>
@@ -32380,7 +32992,7 @@
       </p:sp>
       <p:sp>
         <p:nvSpPr>
-          <p:cNvPr id="26" name="Shape 24"/>
+          <p:cNvPr id="29" name="Shape 27"/>
           <p:cNvSpPr/>
           <p:nvPr/>
         </p:nvSpPr>
@@ -32407,7 +33019,7 @@
       </p:sp>
       <p:sp>
         <p:nvSpPr>
-          <p:cNvPr id="27" name="Text 25"/>
+          <p:cNvPr id="30" name="Text 28"/>
           <p:cNvSpPr/>
           <p:nvPr/>
         </p:nvSpPr>
@@ -32438,7 +33050,7 @@
                 <a:ea typeface="Trebuchet MS" pitchFamily="34" charset="-122"/>
                 <a:cs typeface="Trebuchet MS" pitchFamily="34" charset="-120"/>
               </a:rPr>
-              <a:t>ro</a:t>
+              <a:t>co-ro</a:t>
             </a:r>
             <a:endParaRPr lang="en-US" sz="1400" dirty="0"/>
           </a:p>
@@ -32446,7 +33058,7 @@
       </p:sp>
       <p:sp>
         <p:nvSpPr>
-          <p:cNvPr id="28" name="Text 26"/>
+          <p:cNvPr id="31" name="Text 29"/>
           <p:cNvSpPr/>
           <p:nvPr/>
         </p:nvSpPr>
@@ -32485,7 +33097,7 @@
       </p:sp>
       <p:sp>
         <p:nvSpPr>
-          <p:cNvPr id="29" name="Shape 27"/>
+          <p:cNvPr id="32" name="Shape 30"/>
           <p:cNvSpPr/>
           <p:nvPr/>
         </p:nvSpPr>
@@ -32512,7 +33124,7 @@
       </p:sp>
       <p:sp>
         <p:nvSpPr>
-          <p:cNvPr id="30" name="Text 28"/>
+          <p:cNvPr id="33" name="Text 31"/>
           <p:cNvSpPr/>
           <p:nvPr/>
         </p:nvSpPr>
@@ -32543,7 +33155,7 @@
                 <a:ea typeface="Trebuchet MS" pitchFamily="34" charset="-122"/>
                 <a:cs typeface="Trebuchet MS" pitchFamily="34" charset="-120"/>
               </a:rPr>
-              <a:t>tat</a:t>
+              <a:t>ta</a:t>
             </a:r>
             <a:endParaRPr lang="en-US" sz="1400" dirty="0"/>
           </a:p>
@@ -32551,7 +33163,7 @@
       </p:sp>
       <p:sp>
         <p:nvSpPr>
-          <p:cNvPr id="31" name="Text 29"/>
+          <p:cNvPr id="34" name="Text 32"/>
           <p:cNvSpPr/>
           <p:nvPr/>
         </p:nvSpPr>
@@ -32590,7 +33202,7 @@
       </p:sp>
       <p:sp>
         <p:nvSpPr>
-          <p:cNvPr id="32" name="Shape 30"/>
+          <p:cNvPr id="35" name="Shape 33"/>
           <p:cNvSpPr/>
           <p:nvPr/>
         </p:nvSpPr>
@@ -32617,7 +33229,7 @@
       </p:sp>
       <p:sp>
         <p:nvSpPr>
-          <p:cNvPr id="33" name="Text 31"/>
+          <p:cNvPr id="36" name="Text 34"/>
           <p:cNvSpPr/>
           <p:nvPr/>
         </p:nvSpPr>
@@ -32648,7 +33260,7 @@
                 <a:ea typeface="Trebuchet MS" pitchFamily="34" charset="-122"/>
                 <a:cs typeface="Trebuchet MS" pitchFamily="34" charset="-120"/>
               </a:rPr>
-              <a:t>ing</a:t>
+              <a:t>ting</a:t>
             </a:r>
             <a:endParaRPr lang="en-US" sz="1400" dirty="0"/>
           </a:p>
@@ -32656,7 +33268,7 @@
       </p:sp>
       <p:sp>
         <p:nvSpPr>
-          <p:cNvPr id="34" name="Shape 32"/>
+          <p:cNvPr id="37" name="Shape 35"/>
           <p:cNvSpPr/>
           <p:nvPr/>
         </p:nvSpPr>
@@ -32683,7 +33295,7 @@
       </p:sp>
       <p:sp>
         <p:nvSpPr>
-          <p:cNvPr id="35" name="Text 33"/>
+          <p:cNvPr id="38" name="Text 36"/>
           <p:cNvSpPr/>
           <p:nvPr/>
         </p:nvSpPr>
@@ -32722,18 +33334,18 @@
       </p:sp>
       <p:sp>
         <p:nvSpPr>
-          <p:cNvPr id="36" name="Shape 34"/>
+          <p:cNvPr id="39" name="Shape 37"/>
           <p:cNvSpPr/>
           <p:nvPr/>
         </p:nvSpPr>
         <p:spPr>
           <a:xfrm>
             <a:off x="1874520" y="4096512"/>
-            <a:ext cx="6903720" cy="658368"/>
+            <a:ext cx="6903720" cy="804672"/>
           </a:xfrm>
           <a:prstGeom prst="rect">
             <a:avLst>
-              <a:gd name="adj" fmla="val 8333"/>
+              <a:gd name="adj" fmla="val 6818"/>
             </a:avLst>
           </a:prstGeom>
           <a:solidFill>
@@ -32749,18 +33361,18 @@
       </p:sp>
       <p:sp>
         <p:nvSpPr>
-          <p:cNvPr id="37" name="Shape 35"/>
-          <p:cNvSpPr/>
-          <p:nvPr/>
-        </p:nvSpPr>
-        <p:spPr>
-          <a:xfrm>
-            <a:off x="2254649" y="4169664"/>
-            <a:ext cx="685800" cy="475488"/>
+          <p:cNvPr id="40" name="Shape 38"/>
+          <p:cNvSpPr/>
+          <p:nvPr/>
+        </p:nvSpPr>
+        <p:spPr>
+          <a:xfrm>
+            <a:off x="1951330" y="4169664"/>
+            <a:ext cx="676656" cy="384048"/>
           </a:xfrm>
           <a:prstGeom prst="rect">
             <a:avLst>
-              <a:gd name="adj" fmla="val 7692"/>
+              <a:gd name="adj" fmla="val 9524"/>
             </a:avLst>
           </a:prstGeom>
           <a:solidFill>
@@ -32776,14 +33388,14 @@
       </p:sp>
       <p:sp>
         <p:nvSpPr>
-          <p:cNvPr id="38" name="Text 36"/>
-          <p:cNvSpPr/>
-          <p:nvPr/>
-        </p:nvSpPr>
-        <p:spPr>
-          <a:xfrm>
-            <a:off x="2254649" y="4169664"/>
-            <a:ext cx="685800" cy="475488"/>
+          <p:cNvPr id="41" name="Text 39"/>
+          <p:cNvSpPr/>
+          <p:nvPr/>
+        </p:nvSpPr>
+        <p:spPr>
+          <a:xfrm>
+            <a:off x="1951330" y="4169664"/>
+            <a:ext cx="676656" cy="384048"/>
           </a:xfrm>
           <a:prstGeom prst="rect">
             <a:avLst/>
@@ -32807,7 +33419,7 @@
                 <a:ea typeface="Trebuchet MS" pitchFamily="34" charset="-122"/>
                 <a:cs typeface="Trebuchet MS" pitchFamily="34" charset="-120"/>
               </a:rPr>
-              <a:t>r</a:t>
+              <a:t>c</a:t>
             </a:r>
             <a:endParaRPr lang="en-US" sz="900" dirty="0"/>
           </a:p>
@@ -32815,18 +33427,57 @@
       </p:sp>
       <p:sp>
         <p:nvSpPr>
-          <p:cNvPr id="39" name="Shape 37"/>
-          <p:cNvSpPr/>
-          <p:nvPr/>
-        </p:nvSpPr>
-        <p:spPr>
-          <a:xfrm>
-            <a:off x="3293146" y="4169664"/>
-            <a:ext cx="685800" cy="475488"/>
+          <p:cNvPr id="42" name="Text 40"/>
+          <p:cNvSpPr/>
+          <p:nvPr/>
+        </p:nvSpPr>
+        <p:spPr>
+          <a:xfrm>
+            <a:off x="1951330" y="4572000"/>
+            <a:ext cx="676656" cy="219456"/>
+          </a:xfrm>
+          <a:prstGeom prst="rect">
+            <a:avLst/>
+          </a:prstGeom>
+          <a:noFill/>
+          <a:ln/>
+        </p:spPr>
+        <p:txBody>
+          <a:bodyPr wrap="square" lIns="0" tIns="0" rIns="0" bIns="0" rtlCol="0" anchor="t"/>
+          <a:lstStyle/>
+          <a:p>
+            <a:pPr algn="ctr" indent="0" marL="0">
+              <a:buNone/>
+            </a:pPr>
+            <a:r>
+              <a:rPr lang="en-US" sz="750" i="1" dirty="0">
+                <a:solidFill>
+                  <a:srgbClr val="94A3B8"/>
+                </a:solidFill>
+                <a:latin typeface="Calibri" pitchFamily="34" charset="0"/>
+                <a:ea typeface="Calibri" pitchFamily="34" charset="-122"/>
+                <a:cs typeface="Calibri" pitchFamily="34" charset="-120"/>
+              </a:rPr>
+              <a:t>/k/</a:t>
+            </a:r>
+            <a:endParaRPr lang="en-US" sz="750" dirty="0"/>
+          </a:p>
+        </p:txBody>
+      </p:sp>
+      <p:sp>
+        <p:nvSpPr>
+          <p:cNvPr id="43" name="Shape 41"/>
+          <p:cNvSpPr/>
+          <p:nvPr/>
+        </p:nvSpPr>
+        <p:spPr>
+          <a:xfrm>
+            <a:off x="2677363" y="4169664"/>
+            <a:ext cx="676656" cy="384048"/>
           </a:xfrm>
           <a:prstGeom prst="rect">
             <a:avLst>
-              <a:gd name="adj" fmla="val 7692"/>
+              <a:gd name="adj" fmla="val 9524"/>
             </a:avLst>
           </a:prstGeom>
           <a:solidFill>
@@ -32842,14 +33493,14 @@
       </p:sp>
       <p:sp>
         <p:nvSpPr>
-          <p:cNvPr id="40" name="Text 38"/>
-          <p:cNvSpPr/>
-          <p:nvPr/>
-        </p:nvSpPr>
-        <p:spPr>
-          <a:xfrm>
-            <a:off x="3293146" y="4169664"/>
-            <a:ext cx="685800" cy="475488"/>
+          <p:cNvPr id="44" name="Text 42"/>
+          <p:cNvSpPr/>
+          <p:nvPr/>
+        </p:nvSpPr>
+        <p:spPr>
+          <a:xfrm>
+            <a:off x="2677363" y="4169664"/>
+            <a:ext cx="676656" cy="384048"/>
           </a:xfrm>
           <a:prstGeom prst="rect">
             <a:avLst/>
@@ -32881,18 +33532,18 @@
       </p:sp>
       <p:sp>
         <p:nvSpPr>
-          <p:cNvPr id="41" name="Shape 39"/>
-          <p:cNvSpPr/>
-          <p:nvPr/>
-        </p:nvSpPr>
-        <p:spPr>
-          <a:xfrm>
-            <a:off x="4331643" y="4169664"/>
-            <a:ext cx="685800" cy="475488"/>
+          <p:cNvPr id="45" name="Shape 43"/>
+          <p:cNvSpPr/>
+          <p:nvPr/>
+        </p:nvSpPr>
+        <p:spPr>
+          <a:xfrm>
+            <a:off x="3403397" y="4169664"/>
+            <a:ext cx="676656" cy="384048"/>
           </a:xfrm>
           <a:prstGeom prst="rect">
             <a:avLst>
-              <a:gd name="adj" fmla="val 7692"/>
+              <a:gd name="adj" fmla="val 9524"/>
             </a:avLst>
           </a:prstGeom>
           <a:solidFill>
@@ -32908,14 +33559,14 @@
       </p:sp>
       <p:sp>
         <p:nvSpPr>
-          <p:cNvPr id="42" name="Text 40"/>
-          <p:cNvSpPr/>
-          <p:nvPr/>
-        </p:nvSpPr>
-        <p:spPr>
-          <a:xfrm>
-            <a:off x="4331643" y="4169664"/>
-            <a:ext cx="685800" cy="475488"/>
+          <p:cNvPr id="46" name="Text 44"/>
+          <p:cNvSpPr/>
+          <p:nvPr/>
+        </p:nvSpPr>
+        <p:spPr>
+          <a:xfrm>
+            <a:off x="3403397" y="4169664"/>
+            <a:ext cx="676656" cy="384048"/>
           </a:xfrm>
           <a:prstGeom prst="rect">
             <a:avLst/>
@@ -32939,7 +33590,7 @@
                 <a:ea typeface="Trebuchet MS" pitchFamily="34" charset="-122"/>
                 <a:cs typeface="Trebuchet MS" pitchFamily="34" charset="-120"/>
               </a:rPr>
-              <a:t>t</a:t>
+              <a:t>-</a:t>
             </a:r>
             <a:endParaRPr lang="en-US" sz="900" dirty="0"/>
           </a:p>
@@ -32947,18 +33598,18 @@
       </p:sp>
       <p:sp>
         <p:nvSpPr>
-          <p:cNvPr id="43" name="Shape 41"/>
-          <p:cNvSpPr/>
-          <p:nvPr/>
-        </p:nvSpPr>
-        <p:spPr>
-          <a:xfrm>
-            <a:off x="5370141" y="4169664"/>
-            <a:ext cx="685800" cy="475488"/>
+          <p:cNvPr id="47" name="Shape 45"/>
+          <p:cNvSpPr/>
+          <p:nvPr/>
+        </p:nvSpPr>
+        <p:spPr>
+          <a:xfrm>
+            <a:off x="4129430" y="4169664"/>
+            <a:ext cx="676656" cy="384048"/>
           </a:xfrm>
           <a:prstGeom prst="rect">
             <a:avLst>
-              <a:gd name="adj" fmla="val 7692"/>
+              <a:gd name="adj" fmla="val 9524"/>
             </a:avLst>
           </a:prstGeom>
           <a:solidFill>
@@ -32974,14 +33625,14 @@
       </p:sp>
       <p:sp>
         <p:nvSpPr>
-          <p:cNvPr id="44" name="Text 42"/>
-          <p:cNvSpPr/>
-          <p:nvPr/>
-        </p:nvSpPr>
-        <p:spPr>
-          <a:xfrm>
-            <a:off x="5370141" y="4169664"/>
-            <a:ext cx="685800" cy="475488"/>
+          <p:cNvPr id="48" name="Text 46"/>
+          <p:cNvSpPr/>
+          <p:nvPr/>
+        </p:nvSpPr>
+        <p:spPr>
+          <a:xfrm>
+            <a:off x="4129430" y="4169664"/>
+            <a:ext cx="676656" cy="384048"/>
           </a:xfrm>
           <a:prstGeom prst="rect">
             <a:avLst/>
@@ -33005,7 +33656,7 @@
                 <a:ea typeface="Trebuchet MS" pitchFamily="34" charset="-122"/>
                 <a:cs typeface="Trebuchet MS" pitchFamily="34" charset="-120"/>
               </a:rPr>
-              <a:t>a</a:t>
+              <a:t>r</a:t>
             </a:r>
             <a:endParaRPr lang="en-US" sz="900" dirty="0"/>
           </a:p>
@@ -33013,18 +33664,18 @@
       </p:sp>
       <p:sp>
         <p:nvSpPr>
-          <p:cNvPr id="45" name="Shape 43"/>
-          <p:cNvSpPr/>
-          <p:nvPr/>
-        </p:nvSpPr>
-        <p:spPr>
-          <a:xfrm>
-            <a:off x="6408638" y="4169664"/>
-            <a:ext cx="685800" cy="475488"/>
+          <p:cNvPr id="49" name="Shape 47"/>
+          <p:cNvSpPr/>
+          <p:nvPr/>
+        </p:nvSpPr>
+        <p:spPr>
+          <a:xfrm>
+            <a:off x="4855464" y="4169664"/>
+            <a:ext cx="676656" cy="384048"/>
           </a:xfrm>
           <a:prstGeom prst="rect">
             <a:avLst>
-              <a:gd name="adj" fmla="val 7692"/>
+              <a:gd name="adj" fmla="val 9524"/>
             </a:avLst>
           </a:prstGeom>
           <a:solidFill>
@@ -33040,14 +33691,14 @@
       </p:sp>
       <p:sp>
         <p:nvSpPr>
-          <p:cNvPr id="46" name="Text 44"/>
-          <p:cNvSpPr/>
-          <p:nvPr/>
-        </p:nvSpPr>
-        <p:spPr>
-          <a:xfrm>
-            <a:off x="6408638" y="4169664"/>
-            <a:ext cx="685800" cy="475488"/>
+          <p:cNvPr id="50" name="Text 48"/>
+          <p:cNvSpPr/>
+          <p:nvPr/>
+        </p:nvSpPr>
+        <p:spPr>
+          <a:xfrm>
+            <a:off x="4855464" y="4169664"/>
+            <a:ext cx="676656" cy="384048"/>
           </a:xfrm>
           <a:prstGeom prst="rect">
             <a:avLst/>
@@ -33071,6 +33722,72 @@
                 <a:ea typeface="Trebuchet MS" pitchFamily="34" charset="-122"/>
                 <a:cs typeface="Trebuchet MS" pitchFamily="34" charset="-120"/>
               </a:rPr>
+              <a:t>o</a:t>
+            </a:r>
+            <a:endParaRPr lang="en-US" sz="900" dirty="0"/>
+          </a:p>
+        </p:txBody>
+      </p:sp>
+      <p:sp>
+        <p:nvSpPr>
+          <p:cNvPr id="51" name="Shape 49"/>
+          <p:cNvSpPr/>
+          <p:nvPr/>
+        </p:nvSpPr>
+        <p:spPr>
+          <a:xfrm>
+            <a:off x="5581498" y="4169664"/>
+            <a:ext cx="676656" cy="384048"/>
+          </a:xfrm>
+          <a:prstGeom prst="rect">
+            <a:avLst>
+              <a:gd name="adj" fmla="val 9524"/>
+            </a:avLst>
+          </a:prstGeom>
+          <a:solidFill>
+            <a:srgbClr val="FFFFFF"/>
+          </a:solidFill>
+          <a:ln w="12700">
+            <a:solidFill>
+              <a:srgbClr val="DB2777"/>
+            </a:solidFill>
+            <a:prstDash val="solid"/>
+          </a:ln>
+        </p:spPr>
+      </p:sp>
+      <p:sp>
+        <p:nvSpPr>
+          <p:cNvPr id="52" name="Text 50"/>
+          <p:cNvSpPr/>
+          <p:nvPr/>
+        </p:nvSpPr>
+        <p:spPr>
+          <a:xfrm>
+            <a:off x="5581498" y="4169664"/>
+            <a:ext cx="676656" cy="384048"/>
+          </a:xfrm>
+          <a:prstGeom prst="rect">
+            <a:avLst/>
+          </a:prstGeom>
+          <a:noFill/>
+          <a:ln/>
+        </p:spPr>
+        <p:txBody>
+          <a:bodyPr wrap="square" lIns="0" tIns="0" rIns="0" bIns="0" rtlCol="0" anchor="ctr"/>
+          <a:lstStyle/>
+          <a:p>
+            <a:pPr algn="ctr" indent="0" marL="0">
+              <a:buNone/>
+            </a:pPr>
+            <a:r>
+              <a:rPr lang="en-US" sz="900" b="1" dirty="0">
+                <a:solidFill>
+                  <a:srgbClr val="9D174D"/>
+                </a:solidFill>
+                <a:latin typeface="Trebuchet MS" pitchFamily="34" charset="0"/>
+                <a:ea typeface="Trebuchet MS" pitchFamily="34" charset="-122"/>
+                <a:cs typeface="Trebuchet MS" pitchFamily="34" charset="-120"/>
+              </a:rPr>
               <a:t>t</a:t>
             </a:r>
             <a:endParaRPr lang="en-US" sz="900" dirty="0"/>
@@ -33079,18 +33796,18 @@
       </p:sp>
       <p:sp>
         <p:nvSpPr>
-          <p:cNvPr id="47" name="Shape 45"/>
-          <p:cNvSpPr/>
-          <p:nvPr/>
-        </p:nvSpPr>
-        <p:spPr>
-          <a:xfrm>
-            <a:off x="7447135" y="4169664"/>
-            <a:ext cx="685800" cy="475488"/>
+          <p:cNvPr id="53" name="Shape 51"/>
+          <p:cNvSpPr/>
+          <p:nvPr/>
+        </p:nvSpPr>
+        <p:spPr>
+          <a:xfrm>
+            <a:off x="6307531" y="4169664"/>
+            <a:ext cx="676656" cy="384048"/>
           </a:xfrm>
           <a:prstGeom prst="rect">
             <a:avLst>
-              <a:gd name="adj" fmla="val 7692"/>
+              <a:gd name="adj" fmla="val 9524"/>
             </a:avLst>
           </a:prstGeom>
           <a:solidFill>
@@ -33106,14 +33823,146 @@
       </p:sp>
       <p:sp>
         <p:nvSpPr>
-          <p:cNvPr id="48" name="Text 46"/>
-          <p:cNvSpPr/>
-          <p:nvPr/>
-        </p:nvSpPr>
-        <p:spPr>
-          <a:xfrm>
-            <a:off x="7447135" y="4169664"/>
-            <a:ext cx="685800" cy="475488"/>
+          <p:cNvPr id="54" name="Text 52"/>
+          <p:cNvSpPr/>
+          <p:nvPr/>
+        </p:nvSpPr>
+        <p:spPr>
+          <a:xfrm>
+            <a:off x="6307531" y="4169664"/>
+            <a:ext cx="676656" cy="384048"/>
+          </a:xfrm>
+          <a:prstGeom prst="rect">
+            <a:avLst/>
+          </a:prstGeom>
+          <a:noFill/>
+          <a:ln/>
+        </p:spPr>
+        <p:txBody>
+          <a:bodyPr wrap="square" lIns="0" tIns="0" rIns="0" bIns="0" rtlCol="0" anchor="ctr"/>
+          <a:lstStyle/>
+          <a:p>
+            <a:pPr algn="ctr" indent="0" marL="0">
+              <a:buNone/>
+            </a:pPr>
+            <a:r>
+              <a:rPr lang="en-US" sz="900" b="1" dirty="0">
+                <a:solidFill>
+                  <a:srgbClr val="9D174D"/>
+                </a:solidFill>
+                <a:latin typeface="Trebuchet MS" pitchFamily="34" charset="0"/>
+                <a:ea typeface="Trebuchet MS" pitchFamily="34" charset="-122"/>
+                <a:cs typeface="Trebuchet MS" pitchFamily="34" charset="-120"/>
+              </a:rPr>
+              <a:t>a</a:t>
+            </a:r>
+            <a:endParaRPr lang="en-US" sz="900" dirty="0"/>
+          </a:p>
+        </p:txBody>
+      </p:sp>
+      <p:sp>
+        <p:nvSpPr>
+          <p:cNvPr id="55" name="Shape 53"/>
+          <p:cNvSpPr/>
+          <p:nvPr/>
+        </p:nvSpPr>
+        <p:spPr>
+          <a:xfrm>
+            <a:off x="7033565" y="4169664"/>
+            <a:ext cx="676656" cy="384048"/>
+          </a:xfrm>
+          <a:prstGeom prst="rect">
+            <a:avLst>
+              <a:gd name="adj" fmla="val 9524"/>
+            </a:avLst>
+          </a:prstGeom>
+          <a:solidFill>
+            <a:srgbClr val="FFFFFF"/>
+          </a:solidFill>
+          <a:ln w="12700">
+            <a:solidFill>
+              <a:srgbClr val="DB2777"/>
+            </a:solidFill>
+            <a:prstDash val="solid"/>
+          </a:ln>
+        </p:spPr>
+      </p:sp>
+      <p:sp>
+        <p:nvSpPr>
+          <p:cNvPr id="56" name="Text 54"/>
+          <p:cNvSpPr/>
+          <p:nvPr/>
+        </p:nvSpPr>
+        <p:spPr>
+          <a:xfrm>
+            <a:off x="7033565" y="4169664"/>
+            <a:ext cx="676656" cy="384048"/>
+          </a:xfrm>
+          <a:prstGeom prst="rect">
+            <a:avLst/>
+          </a:prstGeom>
+          <a:noFill/>
+          <a:ln/>
+        </p:spPr>
+        <p:txBody>
+          <a:bodyPr wrap="square" lIns="0" tIns="0" rIns="0" bIns="0" rtlCol="0" anchor="ctr"/>
+          <a:lstStyle/>
+          <a:p>
+            <a:pPr algn="ctr" indent="0" marL="0">
+              <a:buNone/>
+            </a:pPr>
+            <a:r>
+              <a:rPr lang="en-US" sz="900" b="1" dirty="0">
+                <a:solidFill>
+                  <a:srgbClr val="9D174D"/>
+                </a:solidFill>
+                <a:latin typeface="Trebuchet MS" pitchFamily="34" charset="0"/>
+                <a:ea typeface="Trebuchet MS" pitchFamily="34" charset="-122"/>
+                <a:cs typeface="Trebuchet MS" pitchFamily="34" charset="-120"/>
+              </a:rPr>
+              <a:t>t</a:t>
+            </a:r>
+            <a:endParaRPr lang="en-US" sz="900" dirty="0"/>
+          </a:p>
+        </p:txBody>
+      </p:sp>
+      <p:sp>
+        <p:nvSpPr>
+          <p:cNvPr id="57" name="Shape 55"/>
+          <p:cNvSpPr/>
+          <p:nvPr/>
+        </p:nvSpPr>
+        <p:spPr>
+          <a:xfrm>
+            <a:off x="7759598" y="4169664"/>
+            <a:ext cx="676656" cy="384048"/>
+          </a:xfrm>
+          <a:prstGeom prst="rect">
+            <a:avLst>
+              <a:gd name="adj" fmla="val 9524"/>
+            </a:avLst>
+          </a:prstGeom>
+          <a:solidFill>
+            <a:srgbClr val="FFFFFF"/>
+          </a:solidFill>
+          <a:ln w="12700">
+            <a:solidFill>
+              <a:srgbClr val="DB2777"/>
+            </a:solidFill>
+            <a:prstDash val="solid"/>
+          </a:ln>
+        </p:spPr>
+      </p:sp>
+      <p:sp>
+        <p:nvSpPr>
+          <p:cNvPr id="58" name="Text 56"/>
+          <p:cNvSpPr/>
+          <p:nvPr/>
+        </p:nvSpPr>
+        <p:spPr>
+          <a:xfrm>
+            <a:off x="7759598" y="4169664"/>
+            <a:ext cx="676656" cy="384048"/>
           </a:xfrm>
           <a:prstGeom prst="rect">
             <a:avLst/>
@@ -34899,7 +35748,7 @@
                 <a:ea typeface="Trebuchet MS" pitchFamily="34" charset="-122"/>
                 <a:cs typeface="Trebuchet MS" pitchFamily="34" charset="-120"/>
               </a:rPr>
-              <a:t>counter-</a:t>
+              <a:t>re-</a:t>
             </a:r>
             <a:endParaRPr lang="en-US" sz="1300" dirty="0"/>
           </a:p>
@@ -35244,7 +36093,7 @@
                 <a:ea typeface="Trebuchet MS" pitchFamily="34" charset="-122"/>
                 <a:cs typeface="Trebuchet MS" pitchFamily="34" charset="-120"/>
               </a:rPr>
-              <a:t>pre-</a:t>
+              <a:t>counter-</a:t>
             </a:r>
             <a:endParaRPr lang="en-US" sz="1300" dirty="0"/>
           </a:p>
@@ -35397,7 +36246,7 @@
                 <a:ea typeface="Trebuchet MS" pitchFamily="34" charset="-122"/>
                 <a:cs typeface="Trebuchet MS" pitchFamily="34" charset="-120"/>
               </a:rPr>
-              <a:t>auto-</a:t>
+              <a:t>gyro-</a:t>
             </a:r>
             <a:endParaRPr lang="en-US" sz="1300" dirty="0"/>
           </a:p>
@@ -35550,7 +36399,7 @@
                 <a:ea typeface="Trebuchet MS" pitchFamily="34" charset="-122"/>
                 <a:cs typeface="Trebuchet MS" pitchFamily="34" charset="-120"/>
               </a:rPr>
-              <a:t>non-</a:t>
+              <a:t>auto-</a:t>
             </a:r>
             <a:endParaRPr lang="en-US" sz="1300" dirty="0"/>
           </a:p>
@@ -35639,7 +36488,7 @@
                 <a:ea typeface="Trebuchet MS" pitchFamily="34" charset="-122"/>
                 <a:cs typeface="Trebuchet MS" pitchFamily="34" charset="-120"/>
               </a:rPr>
-              <a:t>-ary</a:t>
+              <a:t>-ory</a:t>
             </a:r>
             <a:endParaRPr lang="en-US" sz="1300" dirty="0"/>
           </a:p>
@@ -35744,7 +36593,7 @@
                 <a:ea typeface="Trebuchet MS" pitchFamily="34" charset="-122"/>
                 <a:cs typeface="Trebuchet MS" pitchFamily="34" charset="-120"/>
               </a:rPr>
-              <a:t>rotation</a:t>
+              <a:t>rotate</a:t>
             </a:r>
             <a:endParaRPr lang="en-US" sz="1200" dirty="0"/>
           </a:p>
@@ -35810,7 +36659,7 @@
                 <a:ea typeface="Trebuchet MS" pitchFamily="34" charset="-122"/>
                 <a:cs typeface="Trebuchet MS" pitchFamily="34" charset="-120"/>
               </a:rPr>
-              <a:t>rotating</a:t>
+              <a:t>rotation</a:t>
             </a:r>
             <a:endParaRPr lang="en-US" sz="1200" dirty="0"/>
           </a:p>
@@ -35876,7 +36725,7 @@
                 <a:ea typeface="Trebuchet MS" pitchFamily="34" charset="-122"/>
                 <a:cs typeface="Trebuchet MS" pitchFamily="34" charset="-120"/>
               </a:rPr>
-              <a:t>rotated</a:t>
+              <a:t>rotator</a:t>
             </a:r>
             <a:endParaRPr lang="en-US" sz="1200" dirty="0"/>
           </a:p>
@@ -35942,7 +36791,7 @@
                 <a:ea typeface="Trebuchet MS" pitchFamily="34" charset="-122"/>
                 <a:cs typeface="Trebuchet MS" pitchFamily="34" charset="-120"/>
               </a:rPr>
-              <a:t>rotator</a:t>
+              <a:t>rotatory</a:t>
             </a:r>
             <a:endParaRPr lang="en-US" sz="1200" dirty="0"/>
           </a:p>
@@ -36008,7 +36857,7 @@
                 <a:ea typeface="Trebuchet MS" pitchFamily="34" charset="-122"/>
                 <a:cs typeface="Trebuchet MS" pitchFamily="34" charset="-120"/>
               </a:rPr>
-              <a:t>rotary</a:t>
+              <a:t>rotating</a:t>
             </a:r>
             <a:endParaRPr lang="en-US" sz="1200" dirty="0"/>
           </a:p>
@@ -36074,7 +36923,7 @@
                 <a:ea typeface="Trebuchet MS" pitchFamily="34" charset="-122"/>
                 <a:cs typeface="Trebuchet MS" pitchFamily="34" charset="-120"/>
               </a:rPr>
-              <a:t>counterrotation</a:t>
+              <a:t>rotated</a:t>
             </a:r>
             <a:endParaRPr lang="en-US" sz="1200" dirty="0"/>
           </a:p>
@@ -36140,7 +36989,7 @@
                 <a:ea typeface="Trebuchet MS" pitchFamily="34" charset="-122"/>
                 <a:cs typeface="Trebuchet MS" pitchFamily="34" charset="-120"/>
               </a:rPr>
-              <a:t>rotational</a:t>
+              <a:t>co-rotate</a:t>
             </a:r>
             <a:endParaRPr lang="en-US" sz="1200" dirty="0"/>
           </a:p>
@@ -36206,7 +37055,7 @@
                 <a:ea typeface="Trebuchet MS" pitchFamily="34" charset="-122"/>
                 <a:cs typeface="Trebuchet MS" pitchFamily="34" charset="-120"/>
               </a:rPr>
-              <a:t>autorotation</a:t>
+              <a:t>counter-rotate</a:t>
             </a:r>
             <a:endParaRPr lang="en-US" sz="1200" dirty="0"/>
           </a:p>
@@ -37394,7 +38243,7 @@
                 <a:ea typeface="Calibri" pitchFamily="34" charset="-122"/>
                 <a:cs typeface="Calibri" pitchFamily="34" charset="-120"/>
               </a:rPr>
-              <a:t>1.  The root 'rotate' comes from Latin and means to turn or spin.</a:t>
+              <a:t>1.  The root 'rotate' originally came from a Greek word.</a:t>
             </a:r>
             <a:endParaRPr lang="en-US" sz="1300" dirty="0"/>
           </a:p>
@@ -37417,11 +38266,11 @@
             </a:avLst>
           </a:prstGeom>
           <a:solidFill>
-            <a:srgbClr val="DCFCE7"/>
-          </a:solidFill>
-          <a:ln w="12700">
-            <a:solidFill>
-              <a:srgbClr val="16A34A"/>
+            <a:srgbClr val="FEE2E2"/>
+          </a:solidFill>
+          <a:ln w="12700">
+            <a:solidFill>
+              <a:srgbClr val="DC2626"/>
             </a:solidFill>
             <a:prstDash val="solid"/>
           </a:ln>
@@ -37454,13 +38303,13 @@
             <a:r>
               <a:rPr lang="en-US" sz="1100" b="1" dirty="0">
                 <a:solidFill>
-                  <a:srgbClr val="16A34A"/>
+                  <a:srgbClr val="DC2626"/>
                 </a:solidFill>
                 <a:latin typeface="Trebuchet MS" pitchFamily="34" charset="0"/>
                 <a:ea typeface="Trebuchet MS" pitchFamily="34" charset="-122"/>
                 <a:cs typeface="Trebuchet MS" pitchFamily="34" charset="-120"/>
               </a:rPr>
-              <a:t>TRUE</a:t>
+              <a:t>FALSE</a:t>
             </a:r>
             <a:endParaRPr lang="en-US" sz="1100" dirty="0"/>
           </a:p>
@@ -37533,7 +38382,7 @@
                 <a:ea typeface="Calibri" pitchFamily="34" charset="-122"/>
                 <a:cs typeface="Calibri" pitchFamily="34" charset="-120"/>
               </a:rPr>
-              <a:t>2.  The word 'rotated' means something is currently spinning right now.</a:t>
+              <a:t>2.  The root 'rotate' comes from a Latin word meaning to turn or spin.</a:t>
             </a:r>
             <a:endParaRPr lang="en-US" sz="1300" dirty="0"/>
           </a:p>
@@ -37556,11 +38405,11 @@
             </a:avLst>
           </a:prstGeom>
           <a:solidFill>
-            <a:srgbClr val="FEE2E2"/>
-          </a:solidFill>
-          <a:ln w="12700">
-            <a:solidFill>
-              <a:srgbClr val="DC2626"/>
+            <a:srgbClr val="DCFCE7"/>
+          </a:solidFill>
+          <a:ln w="12700">
+            <a:solidFill>
+              <a:srgbClr val="16A34A"/>
             </a:solidFill>
             <a:prstDash val="solid"/>
           </a:ln>
@@ -37593,13 +38442,13 @@
             <a:r>
               <a:rPr lang="en-US" sz="1100" b="1" dirty="0">
                 <a:solidFill>
-                  <a:srgbClr val="DC2626"/>
+                  <a:srgbClr val="16A34A"/>
                 </a:solidFill>
                 <a:latin typeface="Trebuchet MS" pitchFamily="34" charset="0"/>
                 <a:ea typeface="Trebuchet MS" pitchFamily="34" charset="-122"/>
                 <a:cs typeface="Trebuchet MS" pitchFamily="34" charset="-120"/>
               </a:rPr>
-              <a:t>FALSE</a:t>
+              <a:t>TRUE</a:t>
             </a:r>
             <a:endParaRPr lang="en-US" sz="1100" dirty="0"/>
           </a:p>
@@ -37672,7 +38521,7 @@
                 <a:ea typeface="Calibri" pitchFamily="34" charset="-122"/>
                 <a:cs typeface="Calibri" pitchFamily="34" charset="-120"/>
               </a:rPr>
-              <a:t>3.  A rotator is something that causes turning or spinning movement.</a:t>
+              <a:t>3.  The word 'rotation' means to move in a straight line.</a:t>
             </a:r>
             <a:endParaRPr lang="en-US" sz="1300" dirty="0"/>
           </a:p>
@@ -37695,11 +38544,11 @@
             </a:avLst>
           </a:prstGeom>
           <a:solidFill>
-            <a:srgbClr val="DCFCE7"/>
-          </a:solidFill>
-          <a:ln w="12700">
-            <a:solidFill>
-              <a:srgbClr val="16A34A"/>
+            <a:srgbClr val="FEE2E2"/>
+          </a:solidFill>
+          <a:ln w="12700">
+            <a:solidFill>
+              <a:srgbClr val="DC2626"/>
             </a:solidFill>
             <a:prstDash val="solid"/>
           </a:ln>
@@ -37732,13 +38581,13 @@
             <a:r>
               <a:rPr lang="en-US" sz="1100" b="1" dirty="0">
                 <a:solidFill>
-                  <a:srgbClr val="16A34A"/>
+                  <a:srgbClr val="DC2626"/>
                 </a:solidFill>
                 <a:latin typeface="Trebuchet MS" pitchFamily="34" charset="0"/>
                 <a:ea typeface="Trebuchet MS" pitchFamily="34" charset="-122"/>
                 <a:cs typeface="Trebuchet MS" pitchFamily="34" charset="-120"/>
               </a:rPr>
-              <a:t>TRUE</a:t>
+              <a:t>FALSE</a:t>
             </a:r>
             <a:endParaRPr lang="en-US" sz="1100" dirty="0"/>
           </a:p>
@@ -37811,7 +38660,7 @@
                 <a:ea typeface="Calibri" pitchFamily="34" charset="-122"/>
                 <a:cs typeface="Calibri" pitchFamily="34" charset="-120"/>
               </a:rPr>
-              <a:t>4.  The suffix '-ion' in 'rotation' turns the verb into a noun.</a:t>
+              <a:t>4.  Adding the suffix '-or' to 'rotate' can make the word 'rotator', meaning something that turns.</a:t>
             </a:r>
             <a:endParaRPr lang="en-US" sz="1300" dirty="0"/>
           </a:p>
@@ -37950,7 +38799,7 @@
                 <a:ea typeface="Calibri" pitchFamily="34" charset="-122"/>
                 <a:cs typeface="Calibri" pitchFamily="34" charset="-120"/>
               </a:rPr>
-              <a:t>5.  The prefix 'counter' in 'counterrotation' means the same direction of spinning.</a:t>
+              <a:t>5.  Earth's daily spin on its axis is an example of rotation.</a:t>
             </a:r>
             <a:endParaRPr lang="en-US" sz="1300" dirty="0"/>
           </a:p>
@@ -37973,11 +38822,11 @@
             </a:avLst>
           </a:prstGeom>
           <a:solidFill>
-            <a:srgbClr val="FEE2E2"/>
-          </a:solidFill>
-          <a:ln w="12700">
-            <a:solidFill>
-              <a:srgbClr val="DC2626"/>
+            <a:srgbClr val="DCFCE7"/>
+          </a:solidFill>
+          <a:ln w="12700">
+            <a:solidFill>
+              <a:srgbClr val="16A34A"/>
             </a:solidFill>
             <a:prstDash val="solid"/>
           </a:ln>
@@ -38010,13 +38859,13 @@
             <a:r>
               <a:rPr lang="en-US" sz="1100" b="1" dirty="0">
                 <a:solidFill>
-                  <a:srgbClr val="DC2626"/>
+                  <a:srgbClr val="16A34A"/>
                 </a:solidFill>
                 <a:latin typeface="Trebuchet MS" pitchFamily="34" charset="0"/>
                 <a:ea typeface="Trebuchet MS" pitchFamily="34" charset="-122"/>
                 <a:cs typeface="Trebuchet MS" pitchFamily="34" charset="-120"/>
               </a:rPr>
-              <a:t>FALSE</a:t>
+              <a:t>TRUE</a:t>
             </a:r>
             <a:endParaRPr lang="en-US" sz="1100" dirty="0"/>
           </a:p>
@@ -38589,7 +39438,7 @@
                 <a:ea typeface="Trebuchet MS" pitchFamily="34" charset="-122"/>
                 <a:cs typeface="Trebuchet MS" pitchFamily="34" charset="-120"/>
               </a:rPr>
-              <a:t>rotation</a:t>
+              <a:t>rotate</a:t>
             </a:r>
             <a:endParaRPr lang="en-US" sz="1300" dirty="0"/>
           </a:p>
@@ -38655,7 +39504,7 @@
                 <a:ea typeface="Trebuchet MS" pitchFamily="34" charset="-122"/>
                 <a:cs typeface="Trebuchet MS" pitchFamily="34" charset="-120"/>
               </a:rPr>
-              <a:t>rotating</a:t>
+              <a:t>rotation</a:t>
             </a:r>
             <a:endParaRPr lang="en-US" sz="1300" dirty="0"/>
           </a:p>
@@ -38721,7 +39570,7 @@
                 <a:ea typeface="Trebuchet MS" pitchFamily="34" charset="-122"/>
                 <a:cs typeface="Trebuchet MS" pitchFamily="34" charset="-120"/>
               </a:rPr>
-              <a:t>rotated</a:t>
+              <a:t>rotator</a:t>
             </a:r>
             <a:endParaRPr lang="en-US" sz="1300" dirty="0"/>
           </a:p>
@@ -38787,7 +39636,7 @@
                 <a:ea typeface="Trebuchet MS" pitchFamily="34" charset="-122"/>
                 <a:cs typeface="Trebuchet MS" pitchFamily="34" charset="-120"/>
               </a:rPr>
-              <a:t>rotator</a:t>
+              <a:t>rotatory</a:t>
             </a:r>
             <a:endParaRPr lang="en-US" sz="1300" dirty="0"/>
           </a:p>
@@ -38853,7 +39702,7 @@
                 <a:ea typeface="Trebuchet MS" pitchFamily="34" charset="-122"/>
                 <a:cs typeface="Trebuchet MS" pitchFamily="34" charset="-120"/>
               </a:rPr>
-              <a:t>rotary</a:t>
+              <a:t>rotating</a:t>
             </a:r>
             <a:endParaRPr lang="en-US" sz="1300" dirty="0"/>
           </a:p>
@@ -38919,7 +39768,7 @@
                 <a:ea typeface="Trebuchet MS" pitchFamily="34" charset="-122"/>
                 <a:cs typeface="Trebuchet MS" pitchFamily="34" charset="-120"/>
               </a:rPr>
-              <a:t>counterrotation</a:t>
+              <a:t>rotated</a:t>
             </a:r>
             <a:endParaRPr lang="en-US" sz="1300" dirty="0"/>
           </a:p>
@@ -38985,7 +39834,7 @@
                 <a:ea typeface="Trebuchet MS" pitchFamily="34" charset="-122"/>
                 <a:cs typeface="Trebuchet MS" pitchFamily="34" charset="-120"/>
               </a:rPr>
-              <a:t>rotational</a:t>
+              <a:t>co-rotate</a:t>
             </a:r>
             <a:endParaRPr lang="en-US" sz="1300" dirty="0"/>
           </a:p>
@@ -39578,7 +40427,7 @@
                 <a:ea typeface="Trebuchet MS" pitchFamily="34" charset="-122"/>
                 <a:cs typeface="Trebuchet MS" pitchFamily="34" charset="-120"/>
               </a:rPr>
-              <a:t>counter-</a:t>
+              <a:t>re-</a:t>
             </a:r>
             <a:endParaRPr lang="en-US" sz="1300" dirty="0"/>
           </a:p>
@@ -39923,7 +40772,7 @@
                 <a:ea typeface="Trebuchet MS" pitchFamily="34" charset="-122"/>
                 <a:cs typeface="Trebuchet MS" pitchFamily="34" charset="-120"/>
               </a:rPr>
-              <a:t>pre-</a:t>
+              <a:t>counter-</a:t>
             </a:r>
             <a:endParaRPr lang="en-US" sz="1300" dirty="0"/>
           </a:p>
@@ -40076,7 +40925,7 @@
                 <a:ea typeface="Trebuchet MS" pitchFamily="34" charset="-122"/>
                 <a:cs typeface="Trebuchet MS" pitchFamily="34" charset="-120"/>
               </a:rPr>
-              <a:t>auto-</a:t>
+              <a:t>gyro-</a:t>
             </a:r>
             <a:endParaRPr lang="en-US" sz="1300" dirty="0"/>
           </a:p>
@@ -40229,7 +41078,7 @@
                 <a:ea typeface="Trebuchet MS" pitchFamily="34" charset="-122"/>
                 <a:cs typeface="Trebuchet MS" pitchFamily="34" charset="-120"/>
               </a:rPr>
-              <a:t>non-</a:t>
+              <a:t>auto-</a:t>
             </a:r>
             <a:endParaRPr lang="en-US" sz="1300" dirty="0"/>
           </a:p>
@@ -40318,7 +41167,7 @@
                 <a:ea typeface="Trebuchet MS" pitchFamily="34" charset="-122"/>
                 <a:cs typeface="Trebuchet MS" pitchFamily="34" charset="-120"/>
               </a:rPr>
-              <a:t>-ary</a:t>
+              <a:t>-ory</a:t>
             </a:r>
             <a:endParaRPr lang="en-US" sz="1300" dirty="0"/>
           </a:p>
@@ -40372,7 +41221,7 @@
         <p:spPr>
           <a:xfrm>
             <a:off x="1508760" y="4178808"/>
-            <a:ext cx="1536192" cy="420624"/>
+            <a:ext cx="822960" cy="420624"/>
           </a:xfrm>
           <a:prstGeom prst="rect">
             <a:avLst>
@@ -40406,7 +41255,7 @@
         <p:spPr>
           <a:xfrm>
             <a:off x="1508760" y="4178808"/>
-            <a:ext cx="1536192" cy="420624"/>
+            <a:ext cx="822960" cy="420624"/>
           </a:xfrm>
           <a:prstGeom prst="rect">
             <a:avLst/>
@@ -40430,7 +41279,7 @@
                 <a:ea typeface="Trebuchet MS" pitchFamily="34" charset="-122"/>
                 <a:cs typeface="Trebuchet MS" pitchFamily="34" charset="-120"/>
               </a:rPr>
-              <a:t>counter-</a:t>
+              <a:t>re-</a:t>
             </a:r>
             <a:endParaRPr lang="en-US" sz="1300" dirty="0"/>
           </a:p>
@@ -40444,7 +41293,7 @@
         </p:nvSpPr>
         <p:spPr>
           <a:xfrm>
-            <a:off x="3072384" y="4178808"/>
+            <a:off x="2359152" y="4178808"/>
             <a:ext cx="320040" cy="420624"/>
           </a:xfrm>
           <a:prstGeom prst="rect">
@@ -40483,7 +41332,7 @@
         </p:nvSpPr>
         <p:spPr>
           <a:xfrm>
-            <a:off x="3419856" y="4178808"/>
+            <a:off x="2706624" y="4178808"/>
             <a:ext cx="1536192" cy="420624"/>
           </a:xfrm>
           <a:prstGeom prst="rect">
@@ -40517,7 +41366,7 @@
         </p:nvSpPr>
         <p:spPr>
           <a:xfrm>
-            <a:off x="3419856" y="4178808"/>
+            <a:off x="2706624" y="4178808"/>
             <a:ext cx="1536192" cy="420624"/>
           </a:xfrm>
           <a:prstGeom prst="rect">
@@ -40556,7 +41405,7 @@
         </p:nvSpPr>
         <p:spPr>
           <a:xfrm>
-            <a:off x="4983480" y="4178808"/>
+            <a:off x="4270248" y="4178808"/>
             <a:ext cx="320040" cy="420624"/>
           </a:xfrm>
           <a:prstGeom prst="rect">
@@ -40595,7 +41444,7 @@
         </p:nvSpPr>
         <p:spPr>
           <a:xfrm>
-            <a:off x="5330952" y="4178808"/>
+            <a:off x="4617720" y="4178808"/>
             <a:ext cx="950976" cy="420624"/>
           </a:xfrm>
           <a:prstGeom prst="rect">
@@ -40629,7 +41478,7 @@
         </p:nvSpPr>
         <p:spPr>
           <a:xfrm>
-            <a:off x="5330952" y="4178808"/>
+            <a:off x="4617720" y="4178808"/>
             <a:ext cx="950976" cy="420624"/>
           </a:xfrm>
           <a:prstGeom prst="rect">
@@ -40668,7 +41517,7 @@
         </p:nvSpPr>
         <p:spPr>
           <a:xfrm>
-            <a:off x="6355080" y="4178808"/>
+            <a:off x="5641848" y="4178808"/>
             <a:ext cx="365760" cy="420624"/>
           </a:xfrm>
           <a:prstGeom prst="rect">
@@ -40707,7 +41556,7 @@
         </p:nvSpPr>
         <p:spPr>
           <a:xfrm>
-            <a:off x="6766560" y="4178808"/>
+            <a:off x="6053328" y="4178808"/>
             <a:ext cx="2194560" cy="420624"/>
           </a:xfrm>
           <a:prstGeom prst="rect">
@@ -40734,7 +41583,7 @@
         </p:nvSpPr>
         <p:spPr>
           <a:xfrm>
-            <a:off x="6766560" y="4178808"/>
+            <a:off x="6053328" y="4178808"/>
             <a:ext cx="2194560" cy="420624"/>
           </a:xfrm>
           <a:prstGeom prst="rect">
@@ -40759,7 +41608,7 @@
                 <a:ea typeface="Trebuchet MS" pitchFamily="34" charset="-122"/>
                 <a:cs typeface="Trebuchet MS" pitchFamily="34" charset="-120"/>
               </a:rPr>
-              <a:t>rotation</a:t>
+              <a:t>rotate</a:t>
             </a:r>
             <a:endParaRPr lang="en-US" sz="1400" dirty="0"/>
           </a:p>
@@ -41163,7 +42012,7 @@
                 <a:ea typeface="Trebuchet MS" pitchFamily="34" charset="-122"/>
                 <a:cs typeface="Trebuchet MS" pitchFamily="34" charset="-120"/>
               </a:rPr>
-              <a:t>rotation</a:t>
+              <a:t>rotate</a:t>
             </a:r>
             <a:endParaRPr lang="en-US" sz="1200" dirty="0"/>
           </a:p>
@@ -41229,7 +42078,7 @@
                 <a:ea typeface="Calibri" pitchFamily="34" charset="-122"/>
                 <a:cs typeface="Calibri" pitchFamily="34" charset="-120"/>
               </a:rPr>
-              <a:t>Having to do with turning in a circle, like a rotary phone dial that you spin with your finger.</a:t>
+              <a:t>Currently spinning or turning around a central point.</a:t>
             </a:r>
             <a:endParaRPr lang="en-US" sz="1200" dirty="0"/>
           </a:p>
@@ -41302,7 +42151,7 @@
                 <a:ea typeface="Trebuchet MS" pitchFamily="34" charset="-122"/>
                 <a:cs typeface="Trebuchet MS" pitchFamily="34" charset="-120"/>
               </a:rPr>
-              <a:t>rotating</a:t>
+              <a:t>rotation</a:t>
             </a:r>
             <a:endParaRPr lang="en-US" sz="1200" dirty="0"/>
           </a:p>
@@ -41368,7 +42217,7 @@
                 <a:ea typeface="Calibri" pitchFamily="34" charset="-122"/>
                 <a:cs typeface="Calibri" pitchFamily="34" charset="-120"/>
               </a:rPr>
-              <a:t>Something or someone that makes things turn around, like a muscle that helps you twist your arm.</a:t>
+              <a:t>Describing something that moves in a spinning or turning way.</a:t>
             </a:r>
             <a:endParaRPr lang="en-US" sz="1200" dirty="0"/>
           </a:p>
@@ -41441,7 +42290,7 @@
                 <a:ea typeface="Trebuchet MS" pitchFamily="34" charset="-122"/>
                 <a:cs typeface="Trebuchet MS" pitchFamily="34" charset="-120"/>
               </a:rPr>
-              <a:t>rotated</a:t>
+              <a:t>rotator</a:t>
             </a:r>
             <a:endParaRPr lang="en-US" sz="1200" dirty="0"/>
           </a:p>
@@ -41507,7 +42356,7 @@
                 <a:ea typeface="Calibri" pitchFamily="34" charset="-122"/>
                 <a:cs typeface="Calibri" pitchFamily="34" charset="-120"/>
               </a:rPr>
-              <a:t>Already turned around to a different position, like when you spin a picture to make it straight.</a:t>
+              <a:t>Something or someone that makes things spin or turn around.</a:t>
             </a:r>
             <a:endParaRPr lang="en-US" sz="1200" dirty="0"/>
           </a:p>
@@ -41580,7 +42429,7 @@
                 <a:ea typeface="Trebuchet MS" pitchFamily="34" charset="-122"/>
                 <a:cs typeface="Trebuchet MS" pitchFamily="34" charset="-120"/>
               </a:rPr>
-              <a:t>rotator</a:t>
+              <a:t>rotatory</a:t>
             </a:r>
             <a:endParaRPr lang="en-US" sz="1200" dirty="0"/>
           </a:p>
@@ -41646,7 +42495,7 @@
                 <a:ea typeface="Calibri" pitchFamily="34" charset="-122"/>
                 <a:cs typeface="Calibri" pitchFamily="34" charset="-120"/>
               </a:rPr>
-              <a:t>Relating to movement that goes around in a circle, like the rotational spin of a merry-go-round.</a:t>
+              <a:t>When two things spin together in the same direction at the same time.</a:t>
             </a:r>
             <a:endParaRPr lang="en-US" sz="1200" dirty="0"/>
           </a:p>
@@ -41719,7 +42568,7 @@
                 <a:ea typeface="Trebuchet MS" pitchFamily="34" charset="-122"/>
                 <a:cs typeface="Trebuchet MS" pitchFamily="34" charset="-120"/>
               </a:rPr>
-              <a:t>rotary</a:t>
+              <a:t>rotating</a:t>
             </a:r>
             <a:endParaRPr lang="en-US" sz="1200" dirty="0"/>
           </a:p>
@@ -41785,7 +42634,7 @@
                 <a:ea typeface="Calibri" pitchFamily="34" charset="-122"/>
                 <a:cs typeface="Calibri" pitchFamily="34" charset="-120"/>
               </a:rPr>
-              <a:t>The act of turning around in a circle, like the Earth spinning on its axis.</a:t>
+              <a:t>To spin or turn around a central point, like a wheel spinning on its axle.</a:t>
             </a:r>
             <a:endParaRPr lang="en-US" sz="1200" dirty="0"/>
           </a:p>
@@ -41858,7 +42707,7 @@
                 <a:ea typeface="Trebuchet MS" pitchFamily="34" charset="-122"/>
                 <a:cs typeface="Trebuchet MS" pitchFamily="34" charset="-120"/>
               </a:rPr>
-              <a:t>counterrotation</a:t>
+              <a:t>rotated</a:t>
             </a:r>
             <a:endParaRPr lang="en-US" sz="1200" dirty="0"/>
           </a:p>
@@ -41924,7 +42773,7 @@
                 <a:ea typeface="Calibri" pitchFamily="34" charset="-122"/>
                 <a:cs typeface="Calibri" pitchFamily="34" charset="-120"/>
               </a:rPr>
-              <a:t>When something spins in the opposite direction to something else turning nearby.</a:t>
+              <a:t>Already turned or spun around a central point in the past.</a:t>
             </a:r>
             <a:endParaRPr lang="en-US" sz="1200" dirty="0"/>
           </a:p>
@@ -41997,7 +42846,7 @@
                 <a:ea typeface="Trebuchet MS" pitchFamily="34" charset="-122"/>
                 <a:cs typeface="Trebuchet MS" pitchFamily="34" charset="-120"/>
               </a:rPr>
-              <a:t>rotational</a:t>
+              <a:t>co-rotate</a:t>
             </a:r>
             <a:endParaRPr lang="en-US" sz="1200" dirty="0"/>
           </a:p>
@@ -42063,7 +42912,7 @@
                 <a:ea typeface="Calibri" pitchFamily="34" charset="-122"/>
                 <a:cs typeface="Calibri" pitchFamily="34" charset="-120"/>
               </a:rPr>
-              <a:t>Currently turning around and around, like a spinning top that keeps going.</a:t>
+              <a:t>The act of turning around in a circle, like Earth spinning on its axis.</a:t>
             </a:r>
             <a:endParaRPr lang="en-US" sz="1200" dirty="0"/>
           </a:p>
@@ -42558,7 +43407,7 @@
                 <a:ea typeface="Calibri" pitchFamily="34" charset="-122"/>
                 <a:cs typeface="Calibri" pitchFamily="34" charset="-120"/>
               </a:rPr>
-              <a:t>The Earth completes one full rotation on its axis every twenty-four hours, which is why we have day and night.</a:t>
+              <a:t>The blades of the helicopter begin to rotate faster and faster before it lifts off the ground.</a:t>
             </a:r>
             <a:endParaRPr lang="en-US" sz="1500" dirty="0"/>
           </a:p>
@@ -42722,7 +43571,7 @@
                 <a:ea typeface="Calibri" pitchFamily="34" charset="-122"/>
                 <a:cs typeface="Calibri" pitchFamily="34" charset="-120"/>
               </a:rPr>
-              <a:t>The teacher asked the students to rotate the shape ninety degrees clockwise and draw what they could see.</a:t>
+              <a:t>Our teacher explained that one full rotation of Earth around the Sun takes exactly 365 days.</a:t>
             </a:r>
             <a:endParaRPr lang="en-US" sz="1500" dirty="0"/>
           </a:p>
@@ -42886,7 +43735,7 @@
                 <a:ea typeface="Calibri" pitchFamily="34" charset="-122"/>
                 <a:cs typeface="Calibri" pitchFamily="34" charset="-120"/>
               </a:rPr>
-              <a:t>Farmers use crop rotation so that the soil stays healthy and full of nutrients for each new plant.</a:t>
+              <a:t>The coach asked the players to rotate positions every five minutes so everyone could practise in different spots.</a:t>
             </a:r>
             <a:endParaRPr lang="en-US" sz="1500" dirty="0"/>
           </a:p>
